--- a/Presentation_Founders.pptx
+++ b/Presentation_Founders.pptx
@@ -22,6 +22,14 @@
     <p:sldId id="270" r:id="rId21"/>
     <p:sldId id="271" r:id="rId22"/>
     <p:sldId id="272" r:id="rId23"/>
+    <p:sldId id="273" r:id="rId24"/>
+    <p:sldId id="274" r:id="rId25"/>
+    <p:sldId id="275" r:id="rId26"/>
+    <p:sldId id="276" r:id="rId27"/>
+    <p:sldId id="277" r:id="rId28"/>
+    <p:sldId id="278" r:id="rId29"/>
+    <p:sldId id="279" r:id="rId30"/>
+    <p:sldId id="280" r:id="rId31"/>
   </p:sldIdLst>
   <p:sldSz cx="9144000" cy="5143500" type="screen4x3"/>
   <p:notesSz cx="6858000" cy="9144000"/>
@@ -3169,7 +3177,7 @@
               </a:defRPr>
             </a:pPr>
             <a:r>
-              <a:t>Lifetime Economic Benefits Analysis  •  Proof-of-Concept for Founders  •  January 2026</a:t>
+              <a:t>Lifetime Economic Benefits Analysis  •  Updated February 2026</a:t>
             </a:r>
           </a:p>
         </p:txBody>
@@ -4922,440 +4930,312 @@
               </a:defRPr>
             </a:pPr>
             <a:r>
-              <a:t>Decision Framework: Which Intervention When?</a:t>
+              <a:t>Gender Funnel: Current Data &amp; Key Gaps</a:t>
             </a:r>
           </a:p>
         </p:txBody>
       </p:sp>
-      <p:graphicFrame>
-        <p:nvGraphicFramePr>
-          <p:cNvPr id="3" name="Table 2"/>
-          <p:cNvGraphicFramePr>
-            <a:graphicFrameLocks noGrp="1"/>
-          </p:cNvGraphicFramePr>
+      <p:sp>
+        <p:nvSpPr>
+          <p:cNvPr id="3" name="TextBox 2"/>
+          <p:cNvSpPr txBox="1"/>
           <p:nvPr/>
-        </p:nvGraphicFramePr>
-        <p:xfrm>
-          <a:off x="457200" y="1188720"/>
-          <a:ext cx="6035040" cy="2743200"/>
-        </p:xfrm>
-        <a:graphic>
-          <a:graphicData uri="http://schemas.openxmlformats.org/drawingml/2006/table">
-            <a:tbl>
-              <a:tblPr firstRow="1" bandRow="1">
-                <a:tableStyleId>{5C22544A-7EE6-4342-B048-85BDC9FD1C3A}</a:tableStyleId>
-              </a:tblPr>
-              <a:tblGrid>
-                <a:gridCol w="2011680"/>
-                <a:gridCol w="2011680"/>
-                <a:gridCol w="2011680"/>
-              </a:tblGrid>
-              <a:tr h="457200">
-                <a:tc>
-                  <a:txBody>
-                    <a:bodyPr/>
-                    <a:lstStyle/>
-                    <a:p>
-                      <a:pPr algn="ctr">
-                        <a:defRPr b="1" sz="1400">
-                          <a:solidFill>
-                            <a:srgbClr val="FFFFFF"/>
-                          </a:solidFill>
-                        </a:defRPr>
-                      </a:pPr>
-                      <a:r>
-                        <a:t>If your priority is...</a:t>
-                      </a:r>
-                    </a:p>
-                  </a:txBody>
-                  <a:tcPr>
-                    <a:solidFill>
-                      <a:srgbClr val="1A568C"/>
-                    </a:solidFill>
-                  </a:tcPr>
-                </a:tc>
-                <a:tc>
-                  <a:txBody>
-                    <a:bodyPr/>
-                    <a:lstStyle/>
-                    <a:p>
-                      <a:pPr algn="ctr">
-                        <a:defRPr b="1" sz="1400">
-                          <a:solidFill>
-                            <a:srgbClr val="FFFFFF"/>
-                          </a:solidFill>
-                        </a:defRPr>
-                      </a:pPr>
-                      <a:r>
-                        <a:t>Consider...</a:t>
-                      </a:r>
-                    </a:p>
-                  </a:txBody>
-                  <a:tcPr>
-                    <a:solidFill>
-                      <a:srgbClr val="1A568C"/>
-                    </a:solidFill>
-                  </a:tcPr>
-                </a:tc>
-                <a:tc>
-                  <a:txBody>
-                    <a:bodyPr/>
-                    <a:lstStyle/>
-                    <a:p>
-                      <a:pPr algn="ctr">
-                        <a:defRPr b="1" sz="1400">
-                          <a:solidFill>
-                            <a:srgbClr val="FFFFFF"/>
-                          </a:solidFill>
-                        </a:defRPr>
-                      </a:pPr>
-                      <a:r>
-                        <a:t>Because...</a:t>
-                      </a:r>
-                    </a:p>
-                  </a:txBody>
-                  <a:tcPr>
-                    <a:solidFill>
-                      <a:srgbClr val="1A568C"/>
-                    </a:solidFill>
-                  </a:tcPr>
-                </a:tc>
-              </a:tr>
-              <a:tr h="457200">
-                <a:tc>
-                  <a:txBody>
-                    <a:bodyPr/>
-                    <a:lstStyle/>
-                    <a:p>
-                      <a:pPr algn="ctr">
-                        <a:defRPr sz="1300">
-                          <a:solidFill>
-                            <a:srgbClr val="333333"/>
-                          </a:solidFill>
-                        </a:defRPr>
-                      </a:pPr>
-                      <a:r>
-                        <a:t>Max per-beneficiary impact</a:t>
-                      </a:r>
-                    </a:p>
-                  </a:txBody>
-                  <a:tcPr>
-                    <a:solidFill>
-                      <a:srgbClr val="F5F5F5"/>
-                    </a:solidFill>
-                  </a:tcPr>
-                </a:tc>
-                <a:tc>
-                  <a:txBody>
-                    <a:bodyPr/>
-                    <a:lstStyle/>
-                    <a:p>
-                      <a:pPr algn="ctr">
-                        <a:defRPr sz="1300">
-                          <a:solidFill>
-                            <a:srgbClr val="333333"/>
-                          </a:solidFill>
-                        </a:defRPr>
-                      </a:pPr>
-                      <a:r>
-                        <a:t>Apprenticeship</a:t>
-                      </a:r>
-                    </a:p>
-                  </a:txBody>
-                  <a:tcPr>
-                    <a:solidFill>
-                      <a:srgbClr val="F5F5F5"/>
-                    </a:solidFill>
-                  </a:tcPr>
-                </a:tc>
-                <a:tc>
-                  <a:txBody>
-                    <a:bodyPr/>
-                    <a:lstStyle/>
-                    <a:p>
-                      <a:pPr algn="ctr">
-                        <a:defRPr sz="1300">
-                          <a:solidFill>
-                            <a:srgbClr val="333333"/>
-                          </a:solidFill>
-                        </a:defRPr>
-                      </a:pPr>
-                      <a:r>
-                        <a:t>2.5× higher LNPV</a:t>
-                      </a:r>
-                    </a:p>
-                  </a:txBody>
-                  <a:tcPr>
-                    <a:solidFill>
-                      <a:srgbClr val="F5F5F5"/>
-                    </a:solidFill>
-                  </a:tcPr>
-                </a:tc>
-              </a:tr>
-              <a:tr h="457200">
-                <a:tc>
-                  <a:txBody>
-                    <a:bodyPr/>
-                    <a:lstStyle/>
-                    <a:p>
-                      <a:pPr algn="ctr">
-                        <a:defRPr sz="1300">
-                          <a:solidFill>
-                            <a:srgbClr val="333333"/>
-                          </a:solidFill>
-                        </a:defRPr>
-                      </a:pPr>
-                      <a:r>
-                        <a:t>Max reach with limited budget</a:t>
-                      </a:r>
-                    </a:p>
-                  </a:txBody>
-                  <a:tcPr/>
-                </a:tc>
-                <a:tc>
-                  <a:txBody>
-                    <a:bodyPr/>
-                    <a:lstStyle/>
-                    <a:p>
-                      <a:pPr algn="ctr">
-                        <a:defRPr sz="1300">
-                          <a:solidFill>
-                            <a:srgbClr val="333333"/>
-                          </a:solidFill>
-                        </a:defRPr>
-                      </a:pPr>
-                      <a:r>
-                        <a:t>RTE</a:t>
-                      </a:r>
-                    </a:p>
-                  </a:txBody>
-                  <a:tcPr/>
-                </a:tc>
-                <a:tc>
-                  <a:txBody>
-                    <a:bodyPr/>
-                    <a:lstStyle/>
-                    <a:p>
-                      <a:pPr algn="ctr">
-                        <a:defRPr sz="1300">
-                          <a:solidFill>
-                            <a:srgbClr val="333333"/>
-                          </a:solidFill>
-                        </a:defRPr>
-                      </a:pPr>
-                      <a:r>
-                        <a:t>Lower cost, simpler delivery</a:t>
-                      </a:r>
-                    </a:p>
-                  </a:txBody>
-                  <a:tcPr/>
-                </a:tc>
-              </a:tr>
-              <a:tr h="457200">
-                <a:tc>
-                  <a:txBody>
-                    <a:bodyPr/>
-                    <a:lstStyle/>
-                    <a:p>
-                      <a:pPr algn="ctr">
-                        <a:defRPr sz="1300">
-                          <a:solidFill>
-                            <a:srgbClr val="333333"/>
-                          </a:solidFill>
-                        </a:defRPr>
-                      </a:pPr>
-                      <a:r>
-                        <a:t>Serve underserved regions</a:t>
-                      </a:r>
-                    </a:p>
-                  </a:txBody>
-                  <a:tcPr>
-                    <a:solidFill>
-                      <a:srgbClr val="F5F5F5"/>
-                    </a:solidFill>
-                  </a:tcPr>
-                </a:tc>
-                <a:tc>
-                  <a:txBody>
-                    <a:bodyPr/>
-                    <a:lstStyle/>
-                    <a:p>
-                      <a:pPr algn="ctr">
-                        <a:defRPr sz="1300">
-                          <a:solidFill>
-                            <a:srgbClr val="333333"/>
-                          </a:solidFill>
-                        </a:defRPr>
-                      </a:pPr>
-                      <a:r>
-                        <a:t>Targeted Apprenticeship</a:t>
-                      </a:r>
-                    </a:p>
-                  </a:txBody>
-                  <a:tcPr>
-                    <a:solidFill>
-                      <a:srgbClr val="F5F5F5"/>
-                    </a:solidFill>
-                  </a:tcPr>
-                </a:tc>
-                <a:tc>
-                  <a:txBody>
-                    <a:bodyPr/>
-                    <a:lstStyle/>
-                    <a:p>
-                      <a:pPr algn="ctr">
-                        <a:defRPr sz="1300">
-                          <a:solidFill>
-                            <a:srgbClr val="333333"/>
-                          </a:solidFill>
-                        </a:defRPr>
-                      </a:pPr>
-                      <a:r>
-                        <a:t>Higher marginal returns</a:t>
-                      </a:r>
-                    </a:p>
-                  </a:txBody>
-                  <a:tcPr>
-                    <a:solidFill>
-                      <a:srgbClr val="F5F5F5"/>
-                    </a:solidFill>
-                  </a:tcPr>
-                </a:tc>
-              </a:tr>
-              <a:tr h="457200">
-                <a:tc>
-                  <a:txBody>
-                    <a:bodyPr/>
-                    <a:lstStyle/>
-                    <a:p>
-                      <a:pPr algn="ctr">
-                        <a:defRPr sz="1300">
-                          <a:solidFill>
-                            <a:srgbClr val="333333"/>
-                          </a:solidFill>
-                        </a:defRPr>
-                      </a:pPr>
-                      <a:r>
-                        <a:t>Long-term systemic change</a:t>
-                      </a:r>
-                    </a:p>
-                  </a:txBody>
-                  <a:tcPr/>
-                </a:tc>
-                <a:tc>
-                  <a:txBody>
-                    <a:bodyPr/>
-                    <a:lstStyle/>
-                    <a:p>
-                      <a:pPr algn="ctr">
-                        <a:defRPr sz="1300">
-                          <a:solidFill>
-                            <a:srgbClr val="333333"/>
-                          </a:solidFill>
-                        </a:defRPr>
-                      </a:pPr>
-                      <a:r>
-                        <a:t>RTE</a:t>
-                      </a:r>
-                    </a:p>
-                  </a:txBody>
-                  <a:tcPr/>
-                </a:tc>
-                <a:tc>
-                  <a:txBody>
-                    <a:bodyPr/>
-                    <a:lstStyle/>
-                    <a:p>
-                      <a:pPr algn="ctr">
-                        <a:defRPr sz="1300">
-                          <a:solidFill>
-                            <a:srgbClr val="333333"/>
-                          </a:solidFill>
-                        </a:defRPr>
-                      </a:pPr>
-                      <a:r>
-                        <a:t>Generational education shift</a:t>
-                      </a:r>
-                    </a:p>
-                  </a:txBody>
-                  <a:tcPr/>
-                </a:tc>
-              </a:tr>
-              <a:tr h="457200">
-                <a:tc>
-                  <a:txBody>
-                    <a:bodyPr/>
-                    <a:lstStyle/>
-                    <a:p>
-                      <a:pPr algn="ctr">
-                        <a:defRPr sz="1300">
-                          <a:solidFill>
-                            <a:srgbClr val="333333"/>
-                          </a:solidFill>
-                        </a:defRPr>
-                      </a:pPr>
-                      <a:r>
-                        <a:t>Quick wins / demonstrable outcomes</a:t>
-                      </a:r>
-                    </a:p>
-                  </a:txBody>
-                  <a:tcPr>
-                    <a:solidFill>
-                      <a:srgbClr val="F5F5F5"/>
-                    </a:solidFill>
-                  </a:tcPr>
-                </a:tc>
-                <a:tc>
-                  <a:txBody>
-                    <a:bodyPr/>
-                    <a:lstStyle/>
-                    <a:p>
-                      <a:pPr algn="ctr">
-                        <a:defRPr sz="1300">
-                          <a:solidFill>
-                            <a:srgbClr val="333333"/>
-                          </a:solidFill>
-                        </a:defRPr>
-                      </a:pPr>
-                      <a:r>
-                        <a:t>Apprenticeship</a:t>
-                      </a:r>
-                    </a:p>
-                  </a:txBody>
-                  <a:tcPr>
-                    <a:solidFill>
-                      <a:srgbClr val="F5F5F5"/>
-                    </a:solidFill>
-                  </a:tcPr>
-                </a:tc>
-                <a:tc>
-                  <a:txBody>
-                    <a:bodyPr/>
-                    <a:lstStyle/>
-                    <a:p>
-                      <a:pPr algn="ctr">
-                        <a:defRPr sz="1300">
-                          <a:solidFill>
-                            <a:srgbClr val="333333"/>
-                          </a:solidFill>
-                        </a:defRPr>
-                      </a:pPr>
-                      <a:r>
-                        <a:t>Faster employment results</a:t>
-                      </a:r>
-                    </a:p>
-                  </a:txBody>
-                  <a:tcPr>
-                    <a:solidFill>
-                      <a:srgbClr val="F5F5F5"/>
-                    </a:solidFill>
-                  </a:tcPr>
-                </a:tc>
-              </a:tr>
-            </a:tbl>
-          </a:graphicData>
-        </a:graphic>
-      </p:graphicFrame>
+        </p:nvSpPr>
+        <p:spPr>
+          <a:xfrm>
+            <a:off x="457200" y="1005840"/>
+            <a:ext cx="3931920" cy="457200"/>
+          </a:xfrm>
+          <a:prstGeom prst="rect">
+            <a:avLst/>
+          </a:prstGeom>
+          <a:noFill/>
+        </p:spPr>
+        <p:txBody>
+          <a:bodyPr wrap="none">
+            <a:spAutoFit/>
+          </a:bodyPr>
+          <a:lstStyle/>
+          <a:p>
+            <a:pPr>
+              <a:defRPr sz="2000" b="1">
+                <a:solidFill>
+                  <a:srgbClr val="4A90D9"/>
+                </a:solidFill>
+              </a:defRPr>
+            </a:pPr>
+            <a:r>
+              <a:t>Apprenticeship Funnel</a:t>
+            </a:r>
+          </a:p>
+        </p:txBody>
+      </p:sp>
+      <p:sp>
+        <p:nvSpPr>
+          <p:cNvPr id="4" name="TextBox 3"/>
+          <p:cNvSpPr txBox="1"/>
+          <p:nvPr/>
+        </p:nvSpPr>
+        <p:spPr>
+          <a:xfrm>
+            <a:off x="457200" y="1463040"/>
+            <a:ext cx="3931920" cy="2743200"/>
+          </a:xfrm>
+          <a:prstGeom prst="rect">
+            <a:avLst/>
+          </a:prstGeom>
+          <a:noFill/>
+        </p:spPr>
+        <p:txBody>
+          <a:bodyPr wrap="square">
+            <a:spAutoFit/>
+          </a:bodyPr>
+          <a:lstStyle/>
+          <a:p>
+            <a:pPr>
+              <a:spcAft>
+                <a:spcPts val="800"/>
+              </a:spcAft>
+              <a:defRPr sz="1600">
+                <a:solidFill>
+                  <a:srgbClr val="333333"/>
+                </a:solidFill>
+              </a:defRPr>
+            </a:pPr>
+            <a:r>
+              <a:t>• Mobilized &gt; Registered &gt; Enrolled &gt; Completed &gt; Certified &gt; Placed &gt; Formal &gt; Retained</a:t>
+            </a:r>
+          </a:p>
+          <a:p>
+            <a:pPr>
+              <a:spcAft>
+                <a:spcPts val="800"/>
+              </a:spcAft>
+              <a:defRPr sz="1600">
+                <a:solidFill>
+                  <a:srgbClr val="333333"/>
+                </a:solidFill>
+              </a:defRPr>
+            </a:pPr>
+            <a:r>
+              <a:t>• P(Formal|Apprentice) = 68% (blended)</a:t>
+            </a:r>
+          </a:p>
+          <a:p>
+            <a:pPr>
+              <a:spcAft>
+                <a:spcPts val="800"/>
+              </a:spcAft>
+              <a:defRPr sz="1600">
+                <a:solidFill>
+                  <a:srgbClr val="333333"/>
+                </a:solidFill>
+              </a:defRPr>
+            </a:pPr>
+            <a:r>
+              <a:t>• Gender breakdown: NOT YET AVAILABLE</a:t>
+            </a:r>
+          </a:p>
+          <a:p>
+            <a:pPr>
+              <a:spcAft>
+                <a:spcPts val="800"/>
+              </a:spcAft>
+              <a:defRPr sz="1600">
+                <a:solidFill>
+                  <a:srgbClr val="333333"/>
+                </a:solidFill>
+              </a:defRPr>
+            </a:pPr>
+            <a:r>
+              <a:t>• Female share est. ~30-40% of enrollees</a:t>
+            </a:r>
+          </a:p>
+          <a:p>
+            <a:pPr>
+              <a:spcAft>
+                <a:spcPts val="800"/>
+              </a:spcAft>
+              <a:defRPr sz="1600">
+                <a:solidFill>
+                  <a:srgbClr val="333333"/>
+                </a:solidFill>
+              </a:defRPr>
+            </a:pPr>
+            <a:r>
+              <a:t>• If female P(Formal) is 55% vs 68%, model overstates female NPV by ~24%</a:t>
+            </a:r>
+          </a:p>
+        </p:txBody>
+      </p:sp>
+      <p:sp>
+        <p:nvSpPr>
+          <p:cNvPr id="5" name="TextBox 4"/>
+          <p:cNvSpPr txBox="1"/>
+          <p:nvPr/>
+        </p:nvSpPr>
+        <p:spPr>
+          <a:xfrm>
+            <a:off x="4754880" y="1005840"/>
+            <a:ext cx="3931920" cy="457200"/>
+          </a:xfrm>
+          <a:prstGeom prst="rect">
+            <a:avLst/>
+          </a:prstGeom>
+          <a:noFill/>
+        </p:spPr>
+        <p:txBody>
+          <a:bodyPr wrap="none">
+            <a:spAutoFit/>
+          </a:bodyPr>
+          <a:lstStyle/>
+          <a:p>
+            <a:pPr>
+              <a:defRPr sz="2000" b="1">
+                <a:solidFill>
+                  <a:srgbClr val="4A90D9"/>
+                </a:solidFill>
+              </a:defRPr>
+            </a:pPr>
+            <a:r>
+              <a:t>RTE Funnel</a:t>
+            </a:r>
+          </a:p>
+        </p:txBody>
+      </p:sp>
+      <p:sp>
+        <p:nvSpPr>
+          <p:cNvPr id="6" name="TextBox 5"/>
+          <p:cNvSpPr txBox="1"/>
+          <p:nvPr/>
+        </p:nvSpPr>
+        <p:spPr>
+          <a:xfrm>
+            <a:off x="4754880" y="1463040"/>
+            <a:ext cx="3931920" cy="2743200"/>
+          </a:xfrm>
+          <a:prstGeom prst="rect">
+            <a:avLst/>
+          </a:prstGeom>
+          <a:noFill/>
+        </p:spPr>
+        <p:txBody>
+          <a:bodyPr wrap="square">
+            <a:spAutoFit/>
+          </a:bodyPr>
+          <a:lstStyle/>
+          <a:p>
+            <a:pPr>
+              <a:spcAft>
+                <a:spcPts val="800"/>
+              </a:spcAft>
+              <a:defRPr sz="1600">
+                <a:solidFill>
+                  <a:srgbClr val="333333"/>
+                </a:solidFill>
+              </a:defRPr>
+            </a:pPr>
+            <a:r>
+              <a:t>• Mobilized &gt; Enrolled &gt; Completed Gr 8 &gt; Completed Gr 12 &gt; Labor Market &gt; Formal</a:t>
+            </a:r>
+          </a:p>
+          <a:p>
+            <a:pPr>
+              <a:spcAft>
+                <a:spcPts val="800"/>
+              </a:spcAft>
+              <a:defRPr sz="1600">
+                <a:solidFill>
+                  <a:srgbClr val="333333"/>
+                </a:solidFill>
+              </a:defRPr>
+            </a:pPr>
+            <a:r>
+              <a:t>• P(Formal|RTE) = 30% (expert assumption)</a:t>
+            </a:r>
+          </a:p>
+          <a:p>
+            <a:pPr>
+              <a:spcAft>
+                <a:spcPts val="800"/>
+              </a:spcAft>
+              <a:defRPr sz="1600">
+                <a:solidFill>
+                  <a:srgbClr val="333333"/>
+                </a:solidFill>
+              </a:defRPr>
+            </a:pPr>
+            <a:r>
+              <a:t>• Gender breakdown: NOT YET AVAILABLE</a:t>
+            </a:r>
+          </a:p>
+          <a:p>
+            <a:pPr>
+              <a:spcAft>
+                <a:spcPts val="800"/>
+              </a:spcAft>
+              <a:defRPr sz="1600">
+                <a:solidFill>
+                  <a:srgbClr val="333333"/>
+                </a:solidFill>
+              </a:defRPr>
+            </a:pPr>
+            <a:r>
+              <a:t>• Female LFPR = 37% vs 78% male (PLFS)</a:t>
+            </a:r>
+          </a:p>
+          <a:p>
+            <a:pPr>
+              <a:spcAft>
+                <a:spcPts val="800"/>
+              </a:spcAft>
+              <a:defRPr sz="1600">
+                <a:solidFill>
+                  <a:srgbClr val="333333"/>
+                </a:solidFill>
+              </a:defRPr>
+            </a:pPr>
+            <a:r>
+              <a:t>• Gender wage gap: 24% formal, 32% informal (urban)</a:t>
+            </a:r>
+          </a:p>
+        </p:txBody>
+      </p:sp>
+      <p:sp>
+        <p:nvSpPr>
+          <p:cNvPr id="7" name="TextBox 6"/>
+          <p:cNvSpPr txBox="1"/>
+          <p:nvPr/>
+        </p:nvSpPr>
+        <p:spPr>
+          <a:xfrm>
+            <a:off x="457200" y="4572000"/>
+            <a:ext cx="8229600" cy="548640"/>
+          </a:xfrm>
+          <a:prstGeom prst="rect">
+            <a:avLst/>
+          </a:prstGeom>
+          <a:noFill/>
+        </p:spPr>
+        <p:txBody>
+          <a:bodyPr wrap="square">
+            <a:spAutoFit/>
+          </a:bodyPr>
+          <a:lstStyle/>
+          <a:p>
+            <a:pPr>
+              <a:defRPr sz="1400" i="1">
+                <a:solidFill>
+                  <a:srgbClr val="4A90D9"/>
+                </a:solidFill>
+              </a:defRPr>
+            </a:pPr>
+            <a:r>
+              <a:t>💡 Immediate action: re-query RWF's 68% placement data by gender. This single data point would improve the model at near-zero cost.</a:t>
+            </a:r>
+          </a:p>
+        </p:txBody>
+      </p:sp>
     </p:spTree>
   </p:cSld>
   <p:clrMapOvr>
@@ -5404,21 +5284,487 @@
               </a:defRPr>
             </a:pPr>
             <a:r>
-              <a:t>Strategic Recommendations &amp; Next Steps</a:t>
+              <a:t>Trade Mix &amp; Skill Half-Life: NPV by Trade Category</a:t>
             </a:r>
           </a:p>
         </p:txBody>
       </p:sp>
+      <p:graphicFrame>
+        <p:nvGraphicFramePr>
+          <p:cNvPr id="3" name="Table 2"/>
+          <p:cNvGraphicFramePr>
+            <a:graphicFrameLocks noGrp="1"/>
+          </p:cNvGraphicFramePr>
+          <p:nvPr/>
+        </p:nvGraphicFramePr>
+        <p:xfrm>
+          <a:off x="457200" y="1188720"/>
+          <a:ext cx="8046720" cy="2286000"/>
+        </p:xfrm>
+        <a:graphic>
+          <a:graphicData uri="http://schemas.openxmlformats.org/drawingml/2006/table">
+            <a:tbl>
+              <a:tblPr firstRow="1" bandRow="1">
+                <a:tableStyleId>{5C22544A-7EE6-4342-B048-85BDC9FD1C3A}</a:tableStyleId>
+              </a:tblPr>
+              <a:tblGrid>
+                <a:gridCol w="2011680"/>
+                <a:gridCol w="2011680"/>
+                <a:gridCol w="2011680"/>
+                <a:gridCol w="2011680"/>
+              </a:tblGrid>
+              <a:tr h="457200">
+                <a:tc>
+                  <a:txBody>
+                    <a:bodyPr/>
+                    <a:lstStyle/>
+                    <a:p>
+                      <a:pPr algn="ctr">
+                        <a:defRPr b="1" sz="1400">
+                          <a:solidFill>
+                            <a:srgbClr val="FFFFFF"/>
+                          </a:solidFill>
+                        </a:defRPr>
+                      </a:pPr>
+                      <a:r>
+                        <a:t>Category</a:t>
+                      </a:r>
+                    </a:p>
+                  </a:txBody>
+                  <a:tcPr>
+                    <a:solidFill>
+                      <a:srgbClr val="1A568C"/>
+                    </a:solidFill>
+                  </a:tcPr>
+                </a:tc>
+                <a:tc>
+                  <a:txBody>
+                    <a:bodyPr/>
+                    <a:lstStyle/>
+                    <a:p>
+                      <a:pPr algn="ctr">
+                        <a:defRPr b="1" sz="1400">
+                          <a:solidFill>
+                            <a:srgbClr val="FFFFFF"/>
+                          </a:solidFill>
+                        </a:defRPr>
+                      </a:pPr>
+                      <a:r>
+                        <a:t>Example Trades</a:t>
+                      </a:r>
+                    </a:p>
+                  </a:txBody>
+                  <a:tcPr>
+                    <a:solidFill>
+                      <a:srgbClr val="1A568C"/>
+                    </a:solidFill>
+                  </a:tcPr>
+                </a:tc>
+                <a:tc>
+                  <a:txBody>
+                    <a:bodyPr/>
+                    <a:lstStyle/>
+                    <a:p>
+                      <a:pPr algn="ctr">
+                        <a:defRPr b="1" sz="1400">
+                          <a:solidFill>
+                            <a:srgbClr val="FFFFFF"/>
+                          </a:solidFill>
+                        </a:defRPr>
+                      </a:pPr>
+                      <a:r>
+                        <a:t>Half-Life</a:t>
+                      </a:r>
+                    </a:p>
+                  </a:txBody>
+                  <a:tcPr>
+                    <a:solidFill>
+                      <a:srgbClr val="1A568C"/>
+                    </a:solidFill>
+                  </a:tcPr>
+                </a:tc>
+                <a:tc>
+                  <a:txBody>
+                    <a:bodyPr/>
+                    <a:lstStyle/>
+                    <a:p>
+                      <a:pPr algn="ctr">
+                        <a:defRPr b="1" sz="1400">
+                          <a:solidFill>
+                            <a:srgbClr val="FFFFFF"/>
+                          </a:solidFill>
+                        </a:defRPr>
+                      </a:pPr>
+                      <a:r>
+                        <a:t>NPV vs Baseline</a:t>
+                      </a:r>
+                    </a:p>
+                  </a:txBody>
+                  <a:tcPr>
+                    <a:solidFill>
+                      <a:srgbClr val="1A568C"/>
+                    </a:solidFill>
+                  </a:tcPr>
+                </a:tc>
+              </a:tr>
+              <a:tr h="457200">
+                <a:tc>
+                  <a:txBody>
+                    <a:bodyPr/>
+                    <a:lstStyle/>
+                    <a:p>
+                      <a:pPr algn="ctr">
+                        <a:defRPr sz="1300">
+                          <a:solidFill>
+                            <a:srgbClr val="333333"/>
+                          </a:solidFill>
+                        </a:defRPr>
+                      </a:pPr>
+                      <a:r>
+                        <a:t>A: Rapid Obsolescence</a:t>
+                      </a:r>
+                    </a:p>
+                  </a:txBody>
+                  <a:tcPr>
+                    <a:solidFill>
+                      <a:srgbClr val="F5F5F5"/>
+                    </a:solidFill>
+                  </a:tcPr>
+                </a:tc>
+                <a:tc>
+                  <a:txBody>
+                    <a:bodyPr/>
+                    <a:lstStyle/>
+                    <a:p>
+                      <a:pPr algn="ctr">
+                        <a:defRPr sz="1300">
+                          <a:solidFill>
+                            <a:srgbClr val="333333"/>
+                          </a:solidFill>
+                        </a:defRPr>
+                      </a:pPr>
+                      <a:r>
+                        <a:t>IT/ITES, Digital Marketing</a:t>
+                      </a:r>
+                    </a:p>
+                  </a:txBody>
+                  <a:tcPr>
+                    <a:solidFill>
+                      <a:srgbClr val="F5F5F5"/>
+                    </a:solidFill>
+                  </a:tcPr>
+                </a:tc>
+                <a:tc>
+                  <a:txBody>
+                    <a:bodyPr/>
+                    <a:lstStyle/>
+                    <a:p>
+                      <a:pPr algn="ctr">
+                        <a:defRPr sz="1300">
+                          <a:solidFill>
+                            <a:srgbClr val="333333"/>
+                          </a:solidFill>
+                        </a:defRPr>
+                      </a:pPr>
+                      <a:r>
+                        <a:t>5-8 yrs</a:t>
+                      </a:r>
+                    </a:p>
+                  </a:txBody>
+                  <a:tcPr>
+                    <a:solidFill>
+                      <a:srgbClr val="F5F5F5"/>
+                    </a:solidFill>
+                  </a:tcPr>
+                </a:tc>
+                <a:tc>
+                  <a:txBody>
+                    <a:bodyPr/>
+                    <a:lstStyle/>
+                    <a:p>
+                      <a:pPr algn="ctr">
+                        <a:defRPr sz="1300">
+                          <a:solidFill>
+                            <a:srgbClr val="333333"/>
+                          </a:solidFill>
+                        </a:defRPr>
+                      </a:pPr>
+                      <a:r>
+                        <a:t>57-84%</a:t>
+                      </a:r>
+                    </a:p>
+                  </a:txBody>
+                  <a:tcPr>
+                    <a:solidFill>
+                      <a:srgbClr val="F5F5F5"/>
+                    </a:solidFill>
+                  </a:tcPr>
+                </a:tc>
+              </a:tr>
+              <a:tr h="457200">
+                <a:tc>
+                  <a:txBody>
+                    <a:bodyPr/>
+                    <a:lstStyle/>
+                    <a:p>
+                      <a:pPr algn="ctr">
+                        <a:defRPr sz="1300">
+                          <a:solidFill>
+                            <a:srgbClr val="333333"/>
+                          </a:solidFill>
+                        </a:defRPr>
+                      </a:pPr>
+                      <a:r>
+                        <a:t>B: Moderate Decay</a:t>
+                      </a:r>
+                    </a:p>
+                  </a:txBody>
+                  <a:tcPr/>
+                </a:tc>
+                <a:tc>
+                  <a:txBody>
+                    <a:bodyPr/>
+                    <a:lstStyle/>
+                    <a:p>
+                      <a:pPr algn="ctr">
+                        <a:defRPr sz="1300">
+                          <a:solidFill>
+                            <a:srgbClr val="333333"/>
+                          </a:solidFill>
+                        </a:defRPr>
+                      </a:pPr>
+                      <a:r>
+                        <a:t>Auto Mechanic, CNC, COPA</a:t>
+                      </a:r>
+                    </a:p>
+                  </a:txBody>
+                  <a:tcPr/>
+                </a:tc>
+                <a:tc>
+                  <a:txBody>
+                    <a:bodyPr/>
+                    <a:lstStyle/>
+                    <a:p>
+                      <a:pPr algn="ctr">
+                        <a:defRPr sz="1300">
+                          <a:solidFill>
+                            <a:srgbClr val="333333"/>
+                          </a:solidFill>
+                        </a:defRPr>
+                      </a:pPr>
+                      <a:r>
+                        <a:t>8-12 yrs</a:t>
+                      </a:r>
+                    </a:p>
+                  </a:txBody>
+                  <a:tcPr/>
+                </a:tc>
+                <a:tc>
+                  <a:txBody>
+                    <a:bodyPr/>
+                    <a:lstStyle/>
+                    <a:p>
+                      <a:pPr algn="ctr">
+                        <a:defRPr sz="1300">
+                          <a:solidFill>
+                            <a:srgbClr val="333333"/>
+                          </a:solidFill>
+                        </a:defRPr>
+                      </a:pPr>
+                      <a:r>
+                        <a:t>92-114%</a:t>
+                      </a:r>
+                    </a:p>
+                  </a:txBody>
+                  <a:tcPr/>
+                </a:tc>
+              </a:tr>
+              <a:tr h="457200">
+                <a:tc>
+                  <a:txBody>
+                    <a:bodyPr/>
+                    <a:lstStyle/>
+                    <a:p>
+                      <a:pPr algn="ctr">
+                        <a:defRPr sz="1300">
+                          <a:solidFill>
+                            <a:srgbClr val="333333"/>
+                          </a:solidFill>
+                        </a:defRPr>
+                      </a:pPr>
+                      <a:r>
+                        <a:t>C: Durable Skills</a:t>
+                      </a:r>
+                    </a:p>
+                  </a:txBody>
+                  <a:tcPr>
+                    <a:solidFill>
+                      <a:srgbClr val="F5F5F5"/>
+                    </a:solidFill>
+                  </a:tcPr>
+                </a:tc>
+                <a:tc>
+                  <a:txBody>
+                    <a:bodyPr/>
+                    <a:lstStyle/>
+                    <a:p>
+                      <a:pPr algn="ctr">
+                        <a:defRPr sz="1300">
+                          <a:solidFill>
+                            <a:srgbClr val="333333"/>
+                          </a:solidFill>
+                        </a:defRPr>
+                      </a:pPr>
+                      <a:r>
+                        <a:t>Electrician, Plumber, Welder</a:t>
+                      </a:r>
+                    </a:p>
+                  </a:txBody>
+                  <a:tcPr>
+                    <a:solidFill>
+                      <a:srgbClr val="F5F5F5"/>
+                    </a:solidFill>
+                  </a:tcPr>
+                </a:tc>
+                <a:tc>
+                  <a:txBody>
+                    <a:bodyPr/>
+                    <a:lstStyle/>
+                    <a:p>
+                      <a:pPr algn="ctr">
+                        <a:defRPr sz="1300">
+                          <a:solidFill>
+                            <a:srgbClr val="333333"/>
+                          </a:solidFill>
+                        </a:defRPr>
+                      </a:pPr>
+                      <a:r>
+                        <a:t>12-18 yrs</a:t>
+                      </a:r>
+                    </a:p>
+                  </a:txBody>
+                  <a:tcPr>
+                    <a:solidFill>
+                      <a:srgbClr val="F5F5F5"/>
+                    </a:solidFill>
+                  </a:tcPr>
+                </a:tc>
+                <a:tc>
+                  <a:txBody>
+                    <a:bodyPr/>
+                    <a:lstStyle/>
+                    <a:p>
+                      <a:pPr algn="ctr">
+                        <a:defRPr sz="1300">
+                          <a:solidFill>
+                            <a:srgbClr val="333333"/>
+                          </a:solidFill>
+                        </a:defRPr>
+                      </a:pPr>
+                      <a:r>
+                        <a:t>114-145%</a:t>
+                      </a:r>
+                    </a:p>
+                  </a:txBody>
+                  <a:tcPr>
+                    <a:solidFill>
+                      <a:srgbClr val="F5F5F5"/>
+                    </a:solidFill>
+                  </a:tcPr>
+                </a:tc>
+              </a:tr>
+              <a:tr h="457200">
+                <a:tc>
+                  <a:txBody>
+                    <a:bodyPr/>
+                    <a:lstStyle/>
+                    <a:p>
+                      <a:pPr algn="ctr">
+                        <a:defRPr sz="1300">
+                          <a:solidFill>
+                            <a:srgbClr val="333333"/>
+                          </a:solidFill>
+                        </a:defRPr>
+                      </a:pPr>
+                      <a:r>
+                        <a:t>D: Long-Term Persistent</a:t>
+                      </a:r>
+                    </a:p>
+                  </a:txBody>
+                  <a:tcPr/>
+                </a:tc>
+                <a:tc>
+                  <a:txBody>
+                    <a:bodyPr/>
+                    <a:lstStyle/>
+                    <a:p>
+                      <a:pPr algn="ctr">
+                        <a:defRPr sz="1300">
+                          <a:solidFill>
+                            <a:srgbClr val="333333"/>
+                          </a:solidFill>
+                        </a:defRPr>
+                      </a:pPr>
+                      <a:r>
+                        <a:t>Health Asst, Draughtsman</a:t>
+                      </a:r>
+                    </a:p>
+                  </a:txBody>
+                  <a:tcPr/>
+                </a:tc>
+                <a:tc>
+                  <a:txBody>
+                    <a:bodyPr/>
+                    <a:lstStyle/>
+                    <a:p>
+                      <a:pPr algn="ctr">
+                        <a:defRPr sz="1300">
+                          <a:solidFill>
+                            <a:srgbClr val="333333"/>
+                          </a:solidFill>
+                        </a:defRPr>
+                      </a:pPr>
+                      <a:r>
+                        <a:t>18-25 yrs</a:t>
+                      </a:r>
+                    </a:p>
+                  </a:txBody>
+                  <a:tcPr/>
+                </a:tc>
+                <a:tc>
+                  <a:txBody>
+                    <a:bodyPr/>
+                    <a:lstStyle/>
+                    <a:p>
+                      <a:pPr algn="ctr">
+                        <a:defRPr sz="1300">
+                          <a:solidFill>
+                            <a:srgbClr val="333333"/>
+                          </a:solidFill>
+                        </a:defRPr>
+                      </a:pPr>
+                      <a:r>
+                        <a:t>145-170%</a:t>
+                      </a:r>
+                    </a:p>
+                  </a:txBody>
+                  <a:tcPr/>
+                </a:tc>
+              </a:tr>
+            </a:tbl>
+          </a:graphicData>
+        </a:graphic>
+      </p:graphicFrame>
       <p:sp>
         <p:nvSpPr>
-          <p:cNvPr id="3" name="TextBox 2"/>
+          <p:cNvPr id="4" name="TextBox 3"/>
           <p:cNvSpPr txBox="1"/>
           <p:nvPr/>
         </p:nvSpPr>
         <p:spPr>
           <a:xfrm>
-            <a:off x="457200" y="1188720"/>
-            <a:ext cx="8229600" cy="3657600"/>
+            <a:off x="457200" y="4572000"/>
+            <a:ext cx="8229600" cy="548640"/>
           </a:xfrm>
           <a:prstGeom prst="rect">
             <a:avLst/>
@@ -5432,152 +5778,14 @@
           <a:lstStyle/>
           <a:p>
             <a:pPr>
-              <a:spcAft>
-                <a:spcPts val="1200"/>
-              </a:spcAft>
-              <a:defRPr sz="1800">
+              <a:defRPr sz="1400" i="1">
                 <a:solidFill>
-                  <a:srgbClr val="333333"/>
+                  <a:srgbClr val="4A90D9"/>
                 </a:solidFill>
               </a:defRPr>
             </a:pPr>
             <a:r>
-              <a:t>• 1. Both interventions justify continued investment — positive returns in all 32 scenarios</a:t>
-            </a:r>
-          </a:p>
-          <a:p>
-            <a:pPr>
-              <a:spcAft>
-                <a:spcPts val="1200"/>
-              </a:spcAft>
-              <a:defRPr sz="1800">
-                <a:solidFill>
-                  <a:srgbClr val="333333"/>
-                </a:solidFill>
-              </a:defRPr>
-            </a:pPr>
-            <a:r>
-              <a:t>• </a:t>
-            </a:r>
-          </a:p>
-          <a:p>
-            <a:pPr>
-              <a:spcAft>
-                <a:spcPts val="1200"/>
-              </a:spcAft>
-              <a:defRPr sz="1800">
-                <a:solidFill>
-                  <a:srgbClr val="333333"/>
-                </a:solidFill>
-              </a:defRPr>
-            </a:pPr>
-            <a:r>
-              <a:t>• 2. Geographic targeting matters — South/West urban returns are 50%+ higher than North/East rural</a:t>
-            </a:r>
-          </a:p>
-          <a:p>
-            <a:pPr>
-              <a:spcAft>
-                <a:spcPts val="1200"/>
-              </a:spcAft>
-              <a:defRPr sz="1800">
-                <a:solidFill>
-                  <a:srgbClr val="333333"/>
-                </a:solidFill>
-              </a:defRPr>
-            </a:pPr>
-            <a:r>
-              <a:t>• </a:t>
-            </a:r>
-          </a:p>
-          <a:p>
-            <a:pPr>
-              <a:spcAft>
-                <a:spcPts val="1200"/>
-              </a:spcAft>
-              <a:defRPr sz="1800">
-                <a:solidFill>
-                  <a:srgbClr val="333333"/>
-                </a:solidFill>
-              </a:defRPr>
-            </a:pPr>
-            <a:r>
-              <a:t>• 3. Formal sector pathway is key — consider adding career guidance and placement support to RTE</a:t>
-            </a:r>
-          </a:p>
-          <a:p>
-            <a:pPr>
-              <a:spcAft>
-                <a:spcPts val="1200"/>
-              </a:spcAft>
-              <a:defRPr sz="1800">
-                <a:solidFill>
-                  <a:srgbClr val="333333"/>
-                </a:solidFill>
-              </a:defRPr>
-            </a:pPr>
-            <a:r>
-              <a:t>• </a:t>
-            </a:r>
-          </a:p>
-          <a:p>
-            <a:pPr>
-              <a:spcAft>
-                <a:spcPts val="1200"/>
-              </a:spcAft>
-              <a:defRPr sz="1800">
-                <a:solidFill>
-                  <a:srgbClr val="333333"/>
-                </a:solidFill>
-              </a:defRPr>
-            </a:pPr>
-            <a:r>
-              <a:t>• 4. For Apprenticeship, focus on durable skills (electrical, plumbing, welding) over rapidly-changing tech</a:t>
-            </a:r>
-          </a:p>
-          <a:p>
-            <a:pPr>
-              <a:spcAft>
-                <a:spcPts val="1200"/>
-              </a:spcAft>
-              <a:defRPr sz="1800">
-                <a:solidFill>
-                  <a:srgbClr val="333333"/>
-                </a:solidFill>
-              </a:defRPr>
-            </a:pPr>
-            <a:r>
-              <a:t>• </a:t>
-            </a:r>
-          </a:p>
-          <a:p>
-            <a:pPr>
-              <a:spcAft>
-                <a:spcPts val="1200"/>
-              </a:spcAft>
-              <a:defRPr sz="1800">
-                <a:solidFill>
-                  <a:srgbClr val="333333"/>
-                </a:solidFill>
-              </a:defRPr>
-            </a:pPr>
-            <a:r>
-              <a:t>• 5. Priority: Longitudinal Tracer Study (200-300 beneficiaries, 1-2 years, Rs 5-8L cost)</a:t>
-            </a:r>
-          </a:p>
-          <a:p>
-            <a:pPr>
-              <a:spcAft>
-                <a:spcPts val="1200"/>
-              </a:spcAft>
-              <a:defRPr sz="1800">
-                <a:solidFill>
-                  <a:srgbClr val="333333"/>
-                </a:solidFill>
-              </a:defRPr>
-            </a:pPr>
-            <a:r>
-              <a:t>•    → Would reduce uncertainty by 50%+ and validate P(Formal) assumptions</a:t>
+              <a:t>💡 National NATS trade mix is dominated by Category C (43% share), suggesting the model baseline (h=10) may be slightly conservative. Weighted avg h ~ 11.4 years.</a:t>
             </a:r>
           </a:p>
         </p:txBody>
@@ -5608,8 +5816,8 @@
         </p:nvSpPr>
         <p:spPr>
           <a:xfrm>
-            <a:off x="457200" y="2286000"/>
-            <a:ext cx="8229600" cy="1371600"/>
+            <a:off x="457200" y="274320"/>
+            <a:ext cx="8229600" cy="731520"/>
           </a:xfrm>
           <a:prstGeom prst="rect">
             <a:avLst/>
@@ -5622,29 +5830,656 @@
           </a:bodyPr>
           <a:lstStyle/>
           <a:p>
-            <a:pPr algn="ctr">
-              <a:defRPr sz="4000" b="1">
+            <a:pPr>
+              <a:defRPr sz="2800" b="1">
                 <a:solidFill>
                   <a:srgbClr val="1A568C"/>
                 </a:solidFill>
               </a:defRPr>
             </a:pPr>
             <a:r>
-              <a:t>Thank You</a:t>
+              <a:t>Trade Mix Scenarios: BCR Impact</a:t>
             </a:r>
           </a:p>
         </p:txBody>
       </p:sp>
+      <p:graphicFrame>
+        <p:nvGraphicFramePr>
+          <p:cNvPr id="3" name="Table 2"/>
+          <p:cNvGraphicFramePr>
+            <a:graphicFrameLocks noGrp="1"/>
+          </p:cNvGraphicFramePr>
+          <p:nvPr/>
+        </p:nvGraphicFramePr>
+        <p:xfrm>
+          <a:off x="457200" y="1188720"/>
+          <a:ext cx="8229600" cy="2286000"/>
+        </p:xfrm>
+        <a:graphic>
+          <a:graphicData uri="http://schemas.openxmlformats.org/drawingml/2006/table">
+            <a:tbl>
+              <a:tblPr firstRow="1" bandRow="1">
+                <a:tableStyleId>{5C22544A-7EE6-4342-B048-85BDC9FD1C3A}</a:tableStyleId>
+              </a:tblPr>
+              <a:tblGrid>
+                <a:gridCol w="1645920"/>
+                <a:gridCol w="1645920"/>
+                <a:gridCol w="1645920"/>
+                <a:gridCol w="1645920"/>
+                <a:gridCol w="1645920"/>
+              </a:tblGrid>
+              <a:tr h="457200">
+                <a:tc>
+                  <a:txBody>
+                    <a:bodyPr/>
+                    <a:lstStyle/>
+                    <a:p>
+                      <a:pPr algn="ctr">
+                        <a:defRPr b="1" sz="1400">
+                          <a:solidFill>
+                            <a:srgbClr val="FFFFFF"/>
+                          </a:solidFill>
+                        </a:defRPr>
+                      </a:pPr>
+                      <a:r>
+                        <a:t>Scenario</a:t>
+                      </a:r>
+                    </a:p>
+                  </a:txBody>
+                  <a:tcPr>
+                    <a:solidFill>
+                      <a:srgbClr val="1A568C"/>
+                    </a:solidFill>
+                  </a:tcPr>
+                </a:tc>
+                <a:tc>
+                  <a:txBody>
+                    <a:bodyPr/>
+                    <a:lstStyle/>
+                    <a:p>
+                      <a:pPr algn="ctr">
+                        <a:defRPr b="1" sz="1400">
+                          <a:solidFill>
+                            <a:srgbClr val="FFFFFF"/>
+                          </a:solidFill>
+                        </a:defRPr>
+                      </a:pPr>
+                      <a:r>
+                        <a:t>Weighted h</a:t>
+                      </a:r>
+                    </a:p>
+                  </a:txBody>
+                  <a:tcPr>
+                    <a:solidFill>
+                      <a:srgbClr val="1A568C"/>
+                    </a:solidFill>
+                  </a:tcPr>
+                </a:tc>
+                <a:tc>
+                  <a:txBody>
+                    <a:bodyPr/>
+                    <a:lstStyle/>
+                    <a:p>
+                      <a:pPr algn="ctr">
+                        <a:defRPr b="1" sz="1400">
+                          <a:solidFill>
+                            <a:srgbClr val="FFFFFF"/>
+                          </a:solidFill>
+                        </a:defRPr>
+                      </a:pPr>
+                      <a:r>
+                        <a:t>NPV (approx.)</a:t>
+                      </a:r>
+                    </a:p>
+                  </a:txBody>
+                  <a:tcPr>
+                    <a:solidFill>
+                      <a:srgbClr val="1A568C"/>
+                    </a:solidFill>
+                  </a:tcPr>
+                </a:tc>
+                <a:tc>
+                  <a:txBody>
+                    <a:bodyPr/>
+                    <a:lstStyle/>
+                    <a:p>
+                      <a:pPr algn="ctr">
+                        <a:defRPr b="1" sz="1400">
+                          <a:solidFill>
+                            <a:srgbClr val="FFFFFF"/>
+                          </a:solidFill>
+                        </a:defRPr>
+                      </a:pPr>
+                      <a:r>
+                        <a:t>Full BCR</a:t>
+                      </a:r>
+                    </a:p>
+                  </a:txBody>
+                  <a:tcPr>
+                    <a:solidFill>
+                      <a:srgbClr val="1A568C"/>
+                    </a:solidFill>
+                  </a:tcPr>
+                </a:tc>
+                <a:tc>
+                  <a:txBody>
+                    <a:bodyPr/>
+                    <a:lstStyle/>
+                    <a:p>
+                      <a:pPr algn="ctr">
+                        <a:defRPr b="1" sz="1400">
+                          <a:solidFill>
+                            <a:srgbClr val="FFFFFF"/>
+                          </a:solidFill>
+                        </a:defRPr>
+                      </a:pPr>
+                      <a:r>
+                        <a:t>vs Baseline</a:t>
+                      </a:r>
+                    </a:p>
+                  </a:txBody>
+                  <a:tcPr>
+                    <a:solidFill>
+                      <a:srgbClr val="1A568C"/>
+                    </a:solidFill>
+                  </a:tcPr>
+                </a:tc>
+              </a:tr>
+              <a:tr h="457200">
+                <a:tc>
+                  <a:txBody>
+                    <a:bodyPr/>
+                    <a:lstStyle/>
+                    <a:p>
+                      <a:pPr algn="ctr">
+                        <a:defRPr sz="1300">
+                          <a:solidFill>
+                            <a:srgbClr val="333333"/>
+                          </a:solidFill>
+                        </a:defRPr>
+                      </a:pPr>
+                      <a:r>
+                        <a:t>IT-Heavy (pessimistic)</a:t>
+                      </a:r>
+                    </a:p>
+                  </a:txBody>
+                  <a:tcPr>
+                    <a:solidFill>
+                      <a:srgbClr val="F5F5F5"/>
+                    </a:solidFill>
+                  </a:tcPr>
+                </a:tc>
+                <a:tc>
+                  <a:txBody>
+                    <a:bodyPr/>
+                    <a:lstStyle/>
+                    <a:p>
+                      <a:pPr algn="ctr">
+                        <a:defRPr sz="1300">
+                          <a:solidFill>
+                            <a:srgbClr val="333333"/>
+                          </a:solidFill>
+                        </a:defRPr>
+                      </a:pPr>
+                      <a:r>
+                        <a:t>9.2 yrs</a:t>
+                      </a:r>
+                    </a:p>
+                  </a:txBody>
+                  <a:tcPr>
+                    <a:solidFill>
+                      <a:srgbClr val="F5F5F5"/>
+                    </a:solidFill>
+                  </a:tcPr>
+                </a:tc>
+                <a:tc>
+                  <a:txBody>
+                    <a:bodyPr/>
+                    <a:lstStyle/>
+                    <a:p>
+                      <a:pPr algn="ctr">
+                        <a:defRPr sz="1300">
+                          <a:solidFill>
+                            <a:srgbClr val="333333"/>
+                          </a:solidFill>
+                        </a:defRPr>
+                      </a:pPr>
+                      <a:r>
+                        <a:t>Rs 7.5L</a:t>
+                      </a:r>
+                    </a:p>
+                  </a:txBody>
+                  <a:tcPr>
+                    <a:solidFill>
+                      <a:srgbClr val="F5F5F5"/>
+                    </a:solidFill>
+                  </a:tcPr>
+                </a:tc>
+                <a:tc>
+                  <a:txBody>
+                    <a:bodyPr/>
+                    <a:lstStyle/>
+                    <a:p>
+                      <a:pPr algn="ctr">
+                        <a:defRPr sz="1300">
+                          <a:solidFill>
+                            <a:srgbClr val="333333"/>
+                          </a:solidFill>
+                        </a:defRPr>
+                      </a:pPr>
+                      <a:r>
+                        <a:t>4.7:1</a:t>
+                      </a:r>
+                    </a:p>
+                  </a:txBody>
+                  <a:tcPr>
+                    <a:solidFill>
+                      <a:srgbClr val="F5F5F5"/>
+                    </a:solidFill>
+                  </a:tcPr>
+                </a:tc>
+                <a:tc>
+                  <a:txBody>
+                    <a:bodyPr/>
+                    <a:lstStyle/>
+                    <a:p>
+                      <a:pPr algn="ctr">
+                        <a:defRPr sz="1300">
+                          <a:solidFill>
+                            <a:srgbClr val="333333"/>
+                          </a:solidFill>
+                        </a:defRPr>
+                      </a:pPr>
+                      <a:r>
+                        <a:t>-6%</a:t>
+                      </a:r>
+                    </a:p>
+                  </a:txBody>
+                  <a:tcPr>
+                    <a:solidFill>
+                      <a:srgbClr val="F5F5F5"/>
+                    </a:solidFill>
+                  </a:tcPr>
+                </a:tc>
+              </a:tr>
+              <a:tr h="457200">
+                <a:tc>
+                  <a:txBody>
+                    <a:bodyPr/>
+                    <a:lstStyle/>
+                    <a:p>
+                      <a:pPr algn="ctr">
+                        <a:defRPr sz="1300">
+                          <a:solidFill>
+                            <a:srgbClr val="333333"/>
+                          </a:solidFill>
+                        </a:defRPr>
+                      </a:pPr>
+                      <a:r>
+                        <a:t>Balanced National</a:t>
+                      </a:r>
+                    </a:p>
+                  </a:txBody>
+                  <a:tcPr/>
+                </a:tc>
+                <a:tc>
+                  <a:txBody>
+                    <a:bodyPr/>
+                    <a:lstStyle/>
+                    <a:p>
+                      <a:pPr algn="ctr">
+                        <a:defRPr sz="1300">
+                          <a:solidFill>
+                            <a:srgbClr val="333333"/>
+                          </a:solidFill>
+                        </a:defRPr>
+                      </a:pPr>
+                      <a:r>
+                        <a:t>11.4 yrs</a:t>
+                      </a:r>
+                    </a:p>
+                  </a:txBody>
+                  <a:tcPr/>
+                </a:tc>
+                <a:tc>
+                  <a:txBody>
+                    <a:bodyPr/>
+                    <a:lstStyle/>
+                    <a:p>
+                      <a:pPr algn="ctr">
+                        <a:defRPr sz="1300">
+                          <a:solidFill>
+                            <a:srgbClr val="333333"/>
+                          </a:solidFill>
+                        </a:defRPr>
+                      </a:pPr>
+                      <a:r>
+                        <a:t>Rs 8.8L</a:t>
+                      </a:r>
+                    </a:p>
+                  </a:txBody>
+                  <a:tcPr/>
+                </a:tc>
+                <a:tc>
+                  <a:txBody>
+                    <a:bodyPr/>
+                    <a:lstStyle/>
+                    <a:p>
+                      <a:pPr algn="ctr">
+                        <a:defRPr sz="1300">
+                          <a:solidFill>
+                            <a:srgbClr val="333333"/>
+                          </a:solidFill>
+                        </a:defRPr>
+                      </a:pPr>
+                      <a:r>
+                        <a:t>5.6:1</a:t>
+                      </a:r>
+                    </a:p>
+                  </a:txBody>
+                  <a:tcPr/>
+                </a:tc>
+                <a:tc>
+                  <a:txBody>
+                    <a:bodyPr/>
+                    <a:lstStyle/>
+                    <a:p>
+                      <a:pPr algn="ctr">
+                        <a:defRPr sz="1300">
+                          <a:solidFill>
+                            <a:srgbClr val="333333"/>
+                          </a:solidFill>
+                        </a:defRPr>
+                      </a:pPr>
+                      <a:r>
+                        <a:t>+10%</a:t>
+                      </a:r>
+                    </a:p>
+                  </a:txBody>
+                  <a:tcPr/>
+                </a:tc>
+              </a:tr>
+              <a:tr h="457200">
+                <a:tc>
+                  <a:txBody>
+                    <a:bodyPr/>
+                    <a:lstStyle/>
+                    <a:p>
+                      <a:pPr algn="ctr">
+                        <a:defRPr sz="1300">
+                          <a:solidFill>
+                            <a:srgbClr val="333333"/>
+                          </a:solidFill>
+                        </a:defRPr>
+                      </a:pPr>
+                      <a:r>
+                        <a:t>Manufacturing-Heavy</a:t>
+                      </a:r>
+                    </a:p>
+                  </a:txBody>
+                  <a:tcPr>
+                    <a:solidFill>
+                      <a:srgbClr val="F5F5F5"/>
+                    </a:solidFill>
+                  </a:tcPr>
+                </a:tc>
+                <a:tc>
+                  <a:txBody>
+                    <a:bodyPr/>
+                    <a:lstStyle/>
+                    <a:p>
+                      <a:pPr algn="ctr">
+                        <a:defRPr sz="1300">
+                          <a:solidFill>
+                            <a:srgbClr val="333333"/>
+                          </a:solidFill>
+                        </a:defRPr>
+                      </a:pPr>
+                      <a:r>
+                        <a:t>15.1 yrs</a:t>
+                      </a:r>
+                    </a:p>
+                  </a:txBody>
+                  <a:tcPr>
+                    <a:solidFill>
+                      <a:srgbClr val="F5F5F5"/>
+                    </a:solidFill>
+                  </a:tcPr>
+                </a:tc>
+                <a:tc>
+                  <a:txBody>
+                    <a:bodyPr/>
+                    <a:lstStyle/>
+                    <a:p>
+                      <a:pPr algn="ctr">
+                        <a:defRPr sz="1300">
+                          <a:solidFill>
+                            <a:srgbClr val="333333"/>
+                          </a:solidFill>
+                        </a:defRPr>
+                      </a:pPr>
+                      <a:r>
+                        <a:t>Rs 10.5L</a:t>
+                      </a:r>
+                    </a:p>
+                  </a:txBody>
+                  <a:tcPr>
+                    <a:solidFill>
+                      <a:srgbClr val="F5F5F5"/>
+                    </a:solidFill>
+                  </a:tcPr>
+                </a:tc>
+                <a:tc>
+                  <a:txBody>
+                    <a:bodyPr/>
+                    <a:lstStyle/>
+                    <a:p>
+                      <a:pPr algn="ctr">
+                        <a:defRPr sz="1300">
+                          <a:solidFill>
+                            <a:srgbClr val="333333"/>
+                          </a:solidFill>
+                        </a:defRPr>
+                      </a:pPr>
+                      <a:r>
+                        <a:t>6.7:1</a:t>
+                      </a:r>
+                    </a:p>
+                  </a:txBody>
+                  <a:tcPr>
+                    <a:solidFill>
+                      <a:srgbClr val="F5F5F5"/>
+                    </a:solidFill>
+                  </a:tcPr>
+                </a:tc>
+                <a:tc>
+                  <a:txBody>
+                    <a:bodyPr/>
+                    <a:lstStyle/>
+                    <a:p>
+                      <a:pPr algn="ctr">
+                        <a:defRPr sz="1300">
+                          <a:solidFill>
+                            <a:srgbClr val="333333"/>
+                          </a:solidFill>
+                        </a:defRPr>
+                      </a:pPr>
+                      <a:r>
+                        <a:t>+32%</a:t>
+                      </a:r>
+                    </a:p>
+                  </a:txBody>
+                  <a:tcPr>
+                    <a:solidFill>
+                      <a:srgbClr val="F5F5F5"/>
+                    </a:solidFill>
+                  </a:tcPr>
+                </a:tc>
+              </a:tr>
+              <a:tr h="457200">
+                <a:tc>
+                  <a:txBody>
+                    <a:bodyPr/>
+                    <a:lstStyle/>
+                    <a:p>
+                      <a:pPr algn="ctr">
+                        <a:defRPr sz="1300">
+                          <a:solidFill>
+                            <a:srgbClr val="333333"/>
+                          </a:solidFill>
+                        </a:defRPr>
+                      </a:pPr>
+                      <a:r>
+                        <a:t>Model baseline</a:t>
+                      </a:r>
+                    </a:p>
+                  </a:txBody>
+                  <a:tcPr/>
+                </a:tc>
+                <a:tc>
+                  <a:txBody>
+                    <a:bodyPr/>
+                    <a:lstStyle/>
+                    <a:p>
+                      <a:pPr algn="ctr">
+                        <a:defRPr sz="1300">
+                          <a:solidFill>
+                            <a:srgbClr val="333333"/>
+                          </a:solidFill>
+                        </a:defRPr>
+                      </a:pPr>
+                      <a:r>
+                        <a:t>10 yrs</a:t>
+                      </a:r>
+                    </a:p>
+                  </a:txBody>
+                  <a:tcPr/>
+                </a:tc>
+                <a:tc>
+                  <a:txBody>
+                    <a:bodyPr/>
+                    <a:lstStyle/>
+                    <a:p>
+                      <a:pPr algn="ctr">
+                        <a:defRPr sz="1300">
+                          <a:solidFill>
+                            <a:srgbClr val="333333"/>
+                          </a:solidFill>
+                        </a:defRPr>
+                      </a:pPr>
+                      <a:r>
+                        <a:t>Rs 8.0L</a:t>
+                      </a:r>
+                    </a:p>
+                  </a:txBody>
+                  <a:tcPr/>
+                </a:tc>
+                <a:tc>
+                  <a:txBody>
+                    <a:bodyPr/>
+                    <a:lstStyle/>
+                    <a:p>
+                      <a:pPr algn="ctr">
+                        <a:defRPr sz="1300">
+                          <a:solidFill>
+                            <a:srgbClr val="333333"/>
+                          </a:solidFill>
+                        </a:defRPr>
+                      </a:pPr>
+                      <a:r>
+                        <a:t>5.1:1</a:t>
+                      </a:r>
+                    </a:p>
+                  </a:txBody>
+                  <a:tcPr/>
+                </a:tc>
+                <a:tc>
+                  <a:txBody>
+                    <a:bodyPr/>
+                    <a:lstStyle/>
+                    <a:p>
+                      <a:pPr algn="ctr">
+                        <a:defRPr sz="1300">
+                          <a:solidFill>
+                            <a:srgbClr val="333333"/>
+                          </a:solidFill>
+                        </a:defRPr>
+                      </a:pPr>
+                      <a:r>
+                        <a:t>--</a:t>
+                      </a:r>
+                    </a:p>
+                  </a:txBody>
+                  <a:tcPr/>
+                </a:tc>
+              </a:tr>
+            </a:tbl>
+          </a:graphicData>
+        </a:graphic>
+      </p:graphicFrame>
       <p:sp>
         <p:nvSpPr>
-          <p:cNvPr id="3" name="TextBox 2"/>
+          <p:cNvPr id="4" name="TextBox 3"/>
           <p:cNvSpPr txBox="1"/>
           <p:nvPr/>
         </p:nvSpPr>
         <p:spPr>
           <a:xfrm>
-            <a:off x="457200" y="3657600"/>
-            <a:ext cx="8229600" cy="914400"/>
+            <a:off x="457200" y="4572000"/>
+            <a:ext cx="8229600" cy="548640"/>
+          </a:xfrm>
+          <a:prstGeom prst="rect">
+            <a:avLst/>
+          </a:prstGeom>
+          <a:noFill/>
+        </p:spPr>
+        <p:txBody>
+          <a:bodyPr wrap="square">
+            <a:spAutoFit/>
+          </a:bodyPr>
+          <a:lstStyle/>
+          <a:p>
+            <a:pPr>
+              <a:defRPr sz="1400" i="1">
+                <a:solidFill>
+                  <a:srgbClr val="4A90D9"/>
+                </a:solidFill>
+              </a:defRPr>
+            </a:pPr>
+            <a:r>
+              <a:t>💡 Steering youth toward durable trades (electrician, plumber, welder) could increase apprenticeship NPV by ~31%.</a:t>
+            </a:r>
+          </a:p>
+        </p:txBody>
+      </p:sp>
+    </p:spTree>
+  </p:cSld>
+  <p:clrMapOvr>
+    <a:masterClrMapping/>
+  </p:clrMapOvr>
+</p:sld>
+</file>
+
+<file path=ppt/slides/slide18.xml><?xml version="1.0" encoding="utf-8"?>
+<p:sld xmlns:a="http://schemas.openxmlformats.org/drawingml/2006/main" xmlns:p="http://schemas.openxmlformats.org/presentationml/2006/main" xmlns:r="http://schemas.openxmlformats.org/officeDocument/2006/relationships">
+  <p:cSld>
+    <p:spTree>
+      <p:nvGrpSpPr>
+        <p:cNvPr id="1" name=""/>
+        <p:cNvGrpSpPr/>
+        <p:nvPr/>
+      </p:nvGrpSpPr>
+      <p:grpSpPr/>
+      <p:sp>
+        <p:nvSpPr>
+          <p:cNvPr id="2" name="TextBox 1"/>
+          <p:cNvSpPr txBox="1"/>
+          <p:nvPr/>
+        </p:nvSpPr>
+        <p:spPr>
+          <a:xfrm>
+            <a:off x="457200" y="274320"/>
+            <a:ext cx="8229600" cy="731520"/>
           </a:xfrm>
           <a:prstGeom prst="rect">
             <a:avLst/>
@@ -5657,24 +6492,1017 @@
           </a:bodyPr>
           <a:lstStyle/>
           <a:p>
-            <a:pPr algn="ctr">
-              <a:defRPr sz="2400">
+            <a:pPr>
+              <a:defRPr sz="2800" b="1">
                 <a:solidFill>
-                  <a:srgbClr val="959595"/>
+                  <a:srgbClr val="1A568C"/>
                 </a:solidFill>
               </a:defRPr>
             </a:pPr>
             <a:r>
-              <a:t>The key question isn't whether these interventions work —</a:t>
-            </a:r>
-            <a:br/>
-            <a:r>
-              <a:t>it's how to optimize their delivery for maximum impact.</a:t>
-            </a:r>
-            <a:br/>
-            <a:br/>
-            <a:r>
-              <a:t>RWF Economic Impact Model  •  February 2026</a:t>
+              <a:t>Top 5 Evidence Sources</a:t>
+            </a:r>
+          </a:p>
+        </p:txBody>
+      </p:sp>
+      <p:graphicFrame>
+        <p:nvGraphicFramePr>
+          <p:cNvPr id="3" name="Table 2"/>
+          <p:cNvGraphicFramePr>
+            <a:graphicFrameLocks noGrp="1"/>
+          </p:cNvGraphicFramePr>
+          <p:nvPr/>
+        </p:nvGraphicFramePr>
+        <p:xfrm>
+          <a:off x="457200" y="1188720"/>
+          <a:ext cx="8229600" cy="2743200"/>
+        </p:xfrm>
+        <a:graphic>
+          <a:graphicData uri="http://schemas.openxmlformats.org/drawingml/2006/table">
+            <a:tbl>
+              <a:tblPr firstRow="1" bandRow="1">
+                <a:tableStyleId>{5C22544A-7EE6-4342-B048-85BDC9FD1C3A}</a:tableStyleId>
+              </a:tblPr>
+              <a:tblGrid>
+                <a:gridCol w="1645920"/>
+                <a:gridCol w="1645920"/>
+                <a:gridCol w="1645920"/>
+                <a:gridCol w="1645920"/>
+                <a:gridCol w="1645920"/>
+              </a:tblGrid>
+              <a:tr h="457200">
+                <a:tc>
+                  <a:txBody>
+                    <a:bodyPr/>
+                    <a:lstStyle/>
+                    <a:p>
+                      <a:pPr algn="ctr">
+                        <a:defRPr b="1" sz="1400">
+                          <a:solidFill>
+                            <a:srgbClr val="FFFFFF"/>
+                          </a:solidFill>
+                        </a:defRPr>
+                      </a:pPr>
+                      <a:r>
+                        <a:t>#</a:t>
+                      </a:r>
+                    </a:p>
+                  </a:txBody>
+                  <a:tcPr>
+                    <a:solidFill>
+                      <a:srgbClr val="1A568C"/>
+                    </a:solidFill>
+                  </a:tcPr>
+                </a:tc>
+                <a:tc>
+                  <a:txBody>
+                    <a:bodyPr/>
+                    <a:lstStyle/>
+                    <a:p>
+                      <a:pPr algn="ctr">
+                        <a:defRPr b="1" sz="1400">
+                          <a:solidFill>
+                            <a:srgbClr val="FFFFFF"/>
+                          </a:solidFill>
+                        </a:defRPr>
+                      </a:pPr>
+                      <a:r>
+                        <a:t>Source</a:t>
+                      </a:r>
+                    </a:p>
+                  </a:txBody>
+                  <a:tcPr>
+                    <a:solidFill>
+                      <a:srgbClr val="1A568C"/>
+                    </a:solidFill>
+                  </a:tcPr>
+                </a:tc>
+                <a:tc>
+                  <a:txBody>
+                    <a:bodyPr/>
+                    <a:lstStyle/>
+                    <a:p>
+                      <a:pPr algn="ctr">
+                        <a:defRPr b="1" sz="1400">
+                          <a:solidFill>
+                            <a:srgbClr val="FFFFFF"/>
+                          </a:solidFill>
+                        </a:defRPr>
+                      </a:pPr>
+                      <a:r>
+                        <a:t>Used For</a:t>
+                      </a:r>
+                    </a:p>
+                  </a:txBody>
+                  <a:tcPr>
+                    <a:solidFill>
+                      <a:srgbClr val="1A568C"/>
+                    </a:solidFill>
+                  </a:tcPr>
+                </a:tc>
+                <a:tc>
+                  <a:txBody>
+                    <a:bodyPr/>
+                    <a:lstStyle/>
+                    <a:p>
+                      <a:pPr algn="ctr">
+                        <a:defRPr b="1" sz="1400">
+                          <a:solidFill>
+                            <a:srgbClr val="FFFFFF"/>
+                          </a:solidFill>
+                        </a:defRPr>
+                      </a:pPr>
+                      <a:r>
+                        <a:t>Sample</a:t>
+                      </a:r>
+                    </a:p>
+                  </a:txBody>
+                  <a:tcPr>
+                    <a:solidFill>
+                      <a:srgbClr val="1A568C"/>
+                    </a:solidFill>
+                  </a:tcPr>
+                </a:tc>
+                <a:tc>
+                  <a:txBody>
+                    <a:bodyPr/>
+                    <a:lstStyle/>
+                    <a:p>
+                      <a:pPr algn="ctr">
+                        <a:defRPr b="1" sz="1400">
+                          <a:solidFill>
+                            <a:srgbClr val="FFFFFF"/>
+                          </a:solidFill>
+                        </a:defRPr>
+                      </a:pPr>
+                      <a:r>
+                        <a:t>Confidence</a:t>
+                      </a:r>
+                    </a:p>
+                  </a:txBody>
+                  <a:tcPr>
+                    <a:solidFill>
+                      <a:srgbClr val="1A568C"/>
+                    </a:solidFill>
+                  </a:tcPr>
+                </a:tc>
+              </a:tr>
+              <a:tr h="457200">
+                <a:tc>
+                  <a:txBody>
+                    <a:bodyPr/>
+                    <a:lstStyle/>
+                    <a:p>
+                      <a:pPr algn="ctr">
+                        <a:defRPr sz="1300">
+                          <a:solidFill>
+                            <a:srgbClr val="333333"/>
+                          </a:solidFill>
+                        </a:defRPr>
+                      </a:pPr>
+                      <a:r>
+                        <a:t>1</a:t>
+                      </a:r>
+                    </a:p>
+                  </a:txBody>
+                  <a:tcPr>
+                    <a:solidFill>
+                      <a:srgbClr val="F5F5F5"/>
+                    </a:solidFill>
+                  </a:tcPr>
+                </a:tc>
+                <a:tc>
+                  <a:txBody>
+                    <a:bodyPr/>
+                    <a:lstStyle/>
+                    <a:p>
+                      <a:pPr algn="ctr">
+                        <a:defRPr sz="1300">
+                          <a:solidFill>
+                            <a:srgbClr val="333333"/>
+                          </a:solidFill>
+                        </a:defRPr>
+                      </a:pPr>
+                      <a:r>
+                        <a:t>PLFS 2023-24</a:t>
+                      </a:r>
+                    </a:p>
+                  </a:txBody>
+                  <a:tcPr>
+                    <a:solidFill>
+                      <a:srgbClr val="F5F5F5"/>
+                    </a:solidFill>
+                  </a:tcPr>
+                </a:tc>
+                <a:tc>
+                  <a:txBody>
+                    <a:bodyPr/>
+                    <a:lstStyle/>
+                    <a:p>
+                      <a:pPr algn="ctr">
+                        <a:defRPr sz="1300">
+                          <a:solidFill>
+                            <a:srgbClr val="333333"/>
+                          </a:solidFill>
+                        </a:defRPr>
+                      </a:pPr>
+                      <a:r>
+                        <a:t>Baseline wages, employment</a:t>
+                      </a:r>
+                    </a:p>
+                  </a:txBody>
+                  <a:tcPr>
+                    <a:solidFill>
+                      <a:srgbClr val="F5F5F5"/>
+                    </a:solidFill>
+                  </a:tcPr>
+                </a:tc>
+                <a:tc>
+                  <a:txBody>
+                    <a:bodyPr/>
+                    <a:lstStyle/>
+                    <a:p>
+                      <a:pPr algn="ctr">
+                        <a:defRPr sz="1300">
+                          <a:solidFill>
+                            <a:srgbClr val="333333"/>
+                          </a:solidFill>
+                        </a:defRPr>
+                      </a:pPr>
+                      <a:r>
+                        <a:t>~433K individuals</a:t>
+                      </a:r>
+                    </a:p>
+                  </a:txBody>
+                  <a:tcPr>
+                    <a:solidFill>
+                      <a:srgbClr val="F5F5F5"/>
+                    </a:solidFill>
+                  </a:tcPr>
+                </a:tc>
+                <a:tc>
+                  <a:txBody>
+                    <a:bodyPr/>
+                    <a:lstStyle/>
+                    <a:p>
+                      <a:pPr algn="ctr">
+                        <a:defRPr sz="1300">
+                          <a:solidFill>
+                            <a:srgbClr val="333333"/>
+                          </a:solidFill>
+                        </a:defRPr>
+                      </a:pPr>
+                      <a:r>
+                        <a:t>HIGH</a:t>
+                      </a:r>
+                    </a:p>
+                  </a:txBody>
+                  <a:tcPr>
+                    <a:solidFill>
+                      <a:srgbClr val="F5F5F5"/>
+                    </a:solidFill>
+                  </a:tcPr>
+                </a:tc>
+              </a:tr>
+              <a:tr h="457200">
+                <a:tc>
+                  <a:txBody>
+                    <a:bodyPr/>
+                    <a:lstStyle/>
+                    <a:p>
+                      <a:pPr algn="ctr">
+                        <a:defRPr sz="1300">
+                          <a:solidFill>
+                            <a:srgbClr val="333333"/>
+                          </a:solidFill>
+                        </a:defRPr>
+                      </a:pPr>
+                      <a:r>
+                        <a:t>2</a:t>
+                      </a:r>
+                    </a:p>
+                  </a:txBody>
+                  <a:tcPr/>
+                </a:tc>
+                <a:tc>
+                  <a:txBody>
+                    <a:bodyPr/>
+                    <a:lstStyle/>
+                    <a:p>
+                      <a:pPr algn="ctr">
+                        <a:defRPr sz="1300">
+                          <a:solidFill>
+                            <a:srgbClr val="333333"/>
+                          </a:solidFill>
+                        </a:defRPr>
+                      </a:pPr>
+                      <a:r>
+                        <a:t>ILO India Employment 2024</a:t>
+                      </a:r>
+                    </a:p>
+                  </a:txBody>
+                  <a:tcPr/>
+                </a:tc>
+                <a:tc>
+                  <a:txBody>
+                    <a:bodyPr/>
+                    <a:lstStyle/>
+                    <a:p>
+                      <a:pPr algn="ctr">
+                        <a:defRPr sz="1300">
+                          <a:solidFill>
+                            <a:srgbClr val="333333"/>
+                          </a:solidFill>
+                        </a:defRPr>
+                      </a:pPr>
+                      <a:r>
+                        <a:t>Formal entry rates, youth</a:t>
+                      </a:r>
+                    </a:p>
+                  </a:txBody>
+                  <a:tcPr/>
+                </a:tc>
+                <a:tc>
+                  <a:txBody>
+                    <a:bodyPr/>
+                    <a:lstStyle/>
+                    <a:p>
+                      <a:pPr algn="ctr">
+                        <a:defRPr sz="1300">
+                          <a:solidFill>
+                            <a:srgbClr val="333333"/>
+                          </a:solidFill>
+                        </a:defRPr>
+                      </a:pPr>
+                      <a:r>
+                        <a:t>PLFS microdata</a:t>
+                      </a:r>
+                    </a:p>
+                  </a:txBody>
+                  <a:tcPr/>
+                </a:tc>
+                <a:tc>
+                  <a:txBody>
+                    <a:bodyPr/>
+                    <a:lstStyle/>
+                    <a:p>
+                      <a:pPr algn="ctr">
+                        <a:defRPr sz="1300">
+                          <a:solidFill>
+                            <a:srgbClr val="333333"/>
+                          </a:solidFill>
+                        </a:defRPr>
+                      </a:pPr>
+                      <a:r>
+                        <a:t>HIGH</a:t>
+                      </a:r>
+                    </a:p>
+                  </a:txBody>
+                  <a:tcPr/>
+                </a:tc>
+              </a:tr>
+              <a:tr h="457200">
+                <a:tc>
+                  <a:txBody>
+                    <a:bodyPr/>
+                    <a:lstStyle/>
+                    <a:p>
+                      <a:pPr algn="ctr">
+                        <a:defRPr sz="1300">
+                          <a:solidFill>
+                            <a:srgbClr val="333333"/>
+                          </a:solidFill>
+                        </a:defRPr>
+                      </a:pPr>
+                      <a:r>
+                        <a:t>3</a:t>
+                      </a:r>
+                    </a:p>
+                  </a:txBody>
+                  <a:tcPr>
+                    <a:solidFill>
+                      <a:srgbClr val="F5F5F5"/>
+                    </a:solidFill>
+                  </a:tcPr>
+                </a:tc>
+                <a:tc>
+                  <a:txBody>
+                    <a:bodyPr/>
+                    <a:lstStyle/>
+                    <a:p>
+                      <a:pPr algn="ctr">
+                        <a:defRPr sz="1300">
+                          <a:solidFill>
+                            <a:srgbClr val="333333"/>
+                          </a:solidFill>
+                        </a:defRPr>
+                      </a:pPr>
+                      <a:r>
+                        <a:t>Chen et al. (2022)</a:t>
+                      </a:r>
+                    </a:p>
+                  </a:txBody>
+                  <a:tcPr>
+                    <a:solidFill>
+                      <a:srgbClr val="F5F5F5"/>
+                    </a:solidFill>
+                  </a:tcPr>
+                </a:tc>
+                <a:tc>
+                  <a:txBody>
+                    <a:bodyPr/>
+                    <a:lstStyle/>
+                    <a:p>
+                      <a:pPr algn="ctr">
+                        <a:defRPr sz="1300">
+                          <a:solidFill>
+                            <a:srgbClr val="333333"/>
+                          </a:solidFill>
+                        </a:defRPr>
+                      </a:pPr>
+                      <a:r>
+                        <a:t>Mincer returns (5.8%/yr)</a:t>
+                      </a:r>
+                    </a:p>
+                  </a:txBody>
+                  <a:tcPr>
+                    <a:solidFill>
+                      <a:srgbClr val="F5F5F5"/>
+                    </a:solidFill>
+                  </a:tcPr>
+                </a:tc>
+                <a:tc>
+                  <a:txBody>
+                    <a:bodyPr/>
+                    <a:lstStyle/>
+                    <a:p>
+                      <a:pPr algn="ctr">
+                        <a:defRPr sz="1300">
+                          <a:solidFill>
+                            <a:srgbClr val="333333"/>
+                          </a:solidFill>
+                        </a:defRPr>
+                      </a:pPr>
+                      <a:r>
+                        <a:t>~100K households</a:t>
+                      </a:r>
+                    </a:p>
+                  </a:txBody>
+                  <a:tcPr>
+                    <a:solidFill>
+                      <a:srgbClr val="F5F5F5"/>
+                    </a:solidFill>
+                  </a:tcPr>
+                </a:tc>
+                <a:tc>
+                  <a:txBody>
+                    <a:bodyPr/>
+                    <a:lstStyle/>
+                    <a:p>
+                      <a:pPr algn="ctr">
+                        <a:defRPr sz="1300">
+                          <a:solidFill>
+                            <a:srgbClr val="333333"/>
+                          </a:solidFill>
+                        </a:defRPr>
+                      </a:pPr>
+                      <a:r>
+                        <a:t>MODERATE</a:t>
+                      </a:r>
+                    </a:p>
+                  </a:txBody>
+                  <a:tcPr>
+                    <a:solidFill>
+                      <a:srgbClr val="F5F5F5"/>
+                    </a:solidFill>
+                  </a:tcPr>
+                </a:tc>
+              </a:tr>
+              <a:tr h="457200">
+                <a:tc>
+                  <a:txBody>
+                    <a:bodyPr/>
+                    <a:lstStyle/>
+                    <a:p>
+                      <a:pPr algn="ctr">
+                        <a:defRPr sz="1300">
+                          <a:solidFill>
+                            <a:srgbClr val="333333"/>
+                          </a:solidFill>
+                        </a:defRPr>
+                      </a:pPr>
+                      <a:r>
+                        <a:t>4</a:t>
+                      </a:r>
+                    </a:p>
+                  </a:txBody>
+                  <a:tcPr/>
+                </a:tc>
+                <a:tc>
+                  <a:txBody>
+                    <a:bodyPr/>
+                    <a:lstStyle/>
+                    <a:p>
+                      <a:pPr algn="ctr">
+                        <a:defRPr sz="1300">
+                          <a:solidFill>
+                            <a:srgbClr val="333333"/>
+                          </a:solidFill>
+                        </a:defRPr>
+                      </a:pPr>
+                      <a:r>
+                        <a:t>Muralidharan (2013)</a:t>
+                      </a:r>
+                    </a:p>
+                  </a:txBody>
+                  <a:tcPr/>
+                </a:tc>
+                <a:tc>
+                  <a:txBody>
+                    <a:bodyPr/>
+                    <a:lstStyle/>
+                    <a:p>
+                      <a:pPr algn="ctr">
+                        <a:defRPr sz="1300">
+                          <a:solidFill>
+                            <a:srgbClr val="333333"/>
+                          </a:solidFill>
+                        </a:defRPr>
+                      </a:pPr>
+                      <a:r>
+                        <a:t>RTE test score gain (0.137 SD)</a:t>
+                      </a:r>
+                    </a:p>
+                  </a:txBody>
+                  <a:tcPr/>
+                </a:tc>
+                <a:tc>
+                  <a:txBody>
+                    <a:bodyPr/>
+                    <a:lstStyle/>
+                    <a:p>
+                      <a:pPr algn="ctr">
+                        <a:defRPr sz="1300">
+                          <a:solidFill>
+                            <a:srgbClr val="333333"/>
+                          </a:solidFill>
+                        </a:defRPr>
+                      </a:pPr>
+                      <a:r>
+                        <a:t>18,926 obs (RCT)</a:t>
+                      </a:r>
+                    </a:p>
+                  </a:txBody>
+                  <a:tcPr/>
+                </a:tc>
+                <a:tc>
+                  <a:txBody>
+                    <a:bodyPr/>
+                    <a:lstStyle/>
+                    <a:p>
+                      <a:pPr algn="ctr">
+                        <a:defRPr sz="1300">
+                          <a:solidFill>
+                            <a:srgbClr val="333333"/>
+                          </a:solidFill>
+                        </a:defRPr>
+                      </a:pPr>
+                      <a:r>
+                        <a:t>MODERATE</a:t>
+                      </a:r>
+                    </a:p>
+                  </a:txBody>
+                  <a:tcPr/>
+                </a:tc>
+              </a:tr>
+              <a:tr h="457200">
+                <a:tc>
+                  <a:txBody>
+                    <a:bodyPr/>
+                    <a:lstStyle/>
+                    <a:p>
+                      <a:pPr algn="ctr">
+                        <a:defRPr sz="1300">
+                          <a:solidFill>
+                            <a:srgbClr val="333333"/>
+                          </a:solidFill>
+                        </a:defRPr>
+                      </a:pPr>
+                      <a:r>
+                        <a:t>5</a:t>
+                      </a:r>
+                    </a:p>
+                  </a:txBody>
+                  <a:tcPr>
+                    <a:solidFill>
+                      <a:srgbClr val="F5F5F5"/>
+                    </a:solidFill>
+                  </a:tcPr>
+                </a:tc>
+                <a:tc>
+                  <a:txBody>
+                    <a:bodyPr/>
+                    <a:lstStyle/>
+                    <a:p>
+                      <a:pPr algn="ctr">
+                        <a:defRPr sz="1300">
+                          <a:solidFill>
+                            <a:srgbClr val="333333"/>
+                          </a:solidFill>
+                        </a:defRPr>
+                      </a:pPr>
+                      <a:r>
+                        <a:t>RWF Data (Nov 2025)</a:t>
+                      </a:r>
+                    </a:p>
+                  </a:txBody>
+                  <a:tcPr>
+                    <a:solidFill>
+                      <a:srgbClr val="F5F5F5"/>
+                    </a:solidFill>
+                  </a:tcPr>
+                </a:tc>
+                <a:tc>
+                  <a:txBody>
+                    <a:bodyPr/>
+                    <a:lstStyle/>
+                    <a:p>
+                      <a:pPr algn="ctr">
+                        <a:defRPr sz="1300">
+                          <a:solidFill>
+                            <a:srgbClr val="333333"/>
+                          </a:solidFill>
+                        </a:defRPr>
+                      </a:pPr>
+                      <a:r>
+                        <a:t>Placement rate (68%)</a:t>
+                      </a:r>
+                    </a:p>
+                  </a:txBody>
+                  <a:tcPr>
+                    <a:solidFill>
+                      <a:srgbClr val="F5F5F5"/>
+                    </a:solidFill>
+                  </a:tcPr>
+                </a:tc>
+                <a:tc>
+                  <a:txBody>
+                    <a:bodyPr/>
+                    <a:lstStyle/>
+                    <a:p>
+                      <a:pPr algn="ctr">
+                        <a:defRPr sz="1300">
+                          <a:solidFill>
+                            <a:srgbClr val="333333"/>
+                          </a:solidFill>
+                        </a:defRPr>
+                      </a:pPr>
+                      <a:r>
+                        <a:t>RWF participants</a:t>
+                      </a:r>
+                    </a:p>
+                  </a:txBody>
+                  <a:tcPr>
+                    <a:solidFill>
+                      <a:srgbClr val="F5F5F5"/>
+                    </a:solidFill>
+                  </a:tcPr>
+                </a:tc>
+                <a:tc>
+                  <a:txBody>
+                    <a:bodyPr/>
+                    <a:lstStyle/>
+                    <a:p>
+                      <a:pPr algn="ctr">
+                        <a:defRPr sz="1300">
+                          <a:solidFill>
+                            <a:srgbClr val="333333"/>
+                          </a:solidFill>
+                        </a:defRPr>
+                      </a:pPr>
+                      <a:r>
+                        <a:t>HIGH</a:t>
+                      </a:r>
+                    </a:p>
+                  </a:txBody>
+                  <a:tcPr>
+                    <a:solidFill>
+                      <a:srgbClr val="F5F5F5"/>
+                    </a:solidFill>
+                  </a:tcPr>
+                </a:tc>
+              </a:tr>
+            </a:tbl>
+          </a:graphicData>
+        </a:graphic>
+      </p:graphicFrame>
+      <p:sp>
+        <p:nvSpPr>
+          <p:cNvPr id="4" name="TextBox 3"/>
+          <p:cNvSpPr txBox="1"/>
+          <p:nvPr/>
+        </p:nvSpPr>
+        <p:spPr>
+          <a:xfrm>
+            <a:off x="457200" y="4572000"/>
+            <a:ext cx="8229600" cy="548640"/>
+          </a:xfrm>
+          <a:prstGeom prst="rect">
+            <a:avLst/>
+          </a:prstGeom>
+          <a:noFill/>
+        </p:spPr>
+        <p:txBody>
+          <a:bodyPr wrap="square">
+            <a:spAutoFit/>
+          </a:bodyPr>
+          <a:lstStyle/>
+          <a:p>
+            <a:pPr>
+              <a:defRPr sz="1400" i="1">
+                <a:solidFill>
+                  <a:srgbClr val="4A90D9"/>
+                </a:solidFill>
+              </a:defRPr>
+            </a:pPr>
+            <a:r>
+              <a:t>💡 Of 12 high-impact parameters, only 1 has HIGH confidence (P_FORMAL_APPRENTICE). The tracer study targets the 3 LOW-confidence parameters.</a:t>
+            </a:r>
+          </a:p>
+        </p:txBody>
+      </p:sp>
+    </p:spTree>
+  </p:cSld>
+  <p:clrMapOvr>
+    <a:masterClrMapping/>
+  </p:clrMapOvr>
+</p:sld>
+</file>
+
+<file path=ppt/slides/slide19.xml><?xml version="1.0" encoding="utf-8"?>
+<p:sld xmlns:a="http://schemas.openxmlformats.org/drawingml/2006/main" xmlns:p="http://schemas.openxmlformats.org/presentationml/2006/main" xmlns:r="http://schemas.openxmlformats.org/officeDocument/2006/relationships">
+  <p:cSld>
+    <p:spTree>
+      <p:nvGrpSpPr>
+        <p:cNvPr id="1" name=""/>
+        <p:cNvGrpSpPr/>
+        <p:nvPr/>
+      </p:nvGrpSpPr>
+      <p:grpSpPr/>
+      <p:sp>
+        <p:nvSpPr>
+          <p:cNvPr id="2" name="TextBox 1"/>
+          <p:cNvSpPr txBox="1"/>
+          <p:nvPr/>
+        </p:nvSpPr>
+        <p:spPr>
+          <a:xfrm>
+            <a:off x="457200" y="274320"/>
+            <a:ext cx="8229600" cy="731520"/>
+          </a:xfrm>
+          <a:prstGeom prst="rect">
+            <a:avLst/>
+          </a:prstGeom>
+          <a:noFill/>
+        </p:spPr>
+        <p:txBody>
+          <a:bodyPr wrap="none">
+            <a:spAutoFit/>
+          </a:bodyPr>
+          <a:lstStyle/>
+          <a:p>
+            <a:pPr>
+              <a:defRPr sz="2800" b="1">
+                <a:solidFill>
+                  <a:srgbClr val="1A568C"/>
+                </a:solidFill>
+              </a:defRPr>
+            </a:pPr>
+            <a:r>
+              <a:t>Tracer Study: Closing the Evidence Gaps</a:t>
+            </a:r>
+          </a:p>
+        </p:txBody>
+      </p:sp>
+      <p:sp>
+        <p:nvSpPr>
+          <p:cNvPr id="3" name="TextBox 2"/>
+          <p:cNvSpPr txBox="1"/>
+          <p:nvPr/>
+        </p:nvSpPr>
+        <p:spPr>
+          <a:xfrm>
+            <a:off x="457200" y="1188720"/>
+            <a:ext cx="8229600" cy="3657600"/>
+          </a:xfrm>
+          <a:prstGeom prst="rect">
+            <a:avLst/>
+          </a:prstGeom>
+          <a:noFill/>
+        </p:spPr>
+        <p:txBody>
+          <a:bodyPr wrap="square">
+            <a:spAutoFit/>
+          </a:bodyPr>
+          <a:lstStyle/>
+          <a:p>
+            <a:pPr>
+              <a:spcAft>
+                <a:spcPts val="1200"/>
+              </a:spcAft>
+              <a:defRPr sz="1800">
+                <a:solidFill>
+                  <a:srgbClr val="333333"/>
+                </a:solidFill>
+              </a:defRPr>
+            </a:pPr>
+            <a:r>
+              <a:t>• Sample: 1,200-1,600 (300-400 RTE + 300-400 Apprentice + comparison group)</a:t>
+            </a:r>
+          </a:p>
+          <a:p>
+            <a:pPr>
+              <a:spcAft>
+                <a:spcPts val="1200"/>
+              </a:spcAft>
+              <a:defRPr sz="1800">
+                <a:solidFill>
+                  <a:srgbClr val="333333"/>
+                </a:solidFill>
+              </a:defRPr>
+            </a:pPr>
+            <a:r>
+              <a:t>• Cohorts: 2015-2024 (expanded vintage for cross-cohort decay estimation)</a:t>
+            </a:r>
+          </a:p>
+          <a:p>
+            <a:pPr>
+              <a:spcAft>
+                <a:spcPts val="1200"/>
+              </a:spcAft>
+              <a:defRPr sz="1800">
+                <a:solidFill>
+                  <a:srgbClr val="333333"/>
+                </a:solidFill>
+              </a:defRPr>
+            </a:pPr>
+            <a:r>
+              <a:t>• </a:t>
+            </a:r>
+          </a:p>
+          <a:p>
+            <a:pPr>
+              <a:spcAft>
+                <a:spcPts val="1200"/>
+              </a:spcAft>
+              <a:defRPr sz="1800">
+                <a:solidFill>
+                  <a:srgbClr val="333333"/>
+                </a:solidFill>
+              </a:defRPr>
+            </a:pPr>
+            <a:r>
+              <a:t>• Priority research questions:</a:t>
+            </a:r>
+          </a:p>
+          <a:p>
+            <a:pPr>
+              <a:spcAft>
+                <a:spcPts val="1200"/>
+              </a:spcAft>
+              <a:defRPr sz="1800">
+                <a:solidFill>
+                  <a:srgbClr val="333333"/>
+                </a:solidFill>
+              </a:defRPr>
+            </a:pPr>
+            <a:r>
+              <a:t>•   1. P_FORMAL_RTE validation (currently 30%, zero empirical data)</a:t>
+            </a:r>
+          </a:p>
+          <a:p>
+            <a:pPr>
+              <a:spcAft>
+                <a:spcPts val="1200"/>
+              </a:spcAft>
+              <a:defRPr sz="1800">
+                <a:solidFill>
+                  <a:srgbClr val="333333"/>
+                </a:solidFill>
+              </a:defRPr>
+            </a:pPr>
+            <a:r>
+              <a:t>•   2. External validation of P_FORMAL_APPRENTICE (currently 68%)</a:t>
+            </a:r>
+          </a:p>
+          <a:p>
+            <a:pPr>
+              <a:spcAft>
+                <a:spcPts val="1200"/>
+              </a:spcAft>
+              <a:defRPr sz="1800">
+                <a:solidFill>
+                  <a:srgbClr val="333333"/>
+                </a:solidFill>
+              </a:defRPr>
+            </a:pPr>
+            <a:r>
+              <a:t>•   3. Trade-specific decay estimation (IT vs electrician vs health)</a:t>
+            </a:r>
+          </a:p>
+          <a:p>
+            <a:pPr>
+              <a:spcAft>
+                <a:spcPts val="1200"/>
+              </a:spcAft>
+              <a:defRPr sz="1800">
+                <a:solidFill>
+                  <a:srgbClr val="333333"/>
+                </a:solidFill>
+              </a:defRPr>
+            </a:pPr>
+            <a:r>
+              <a:t>•   4. Gender-disaggregated outcomes (placement, wages, retention)</a:t>
+            </a:r>
+          </a:p>
+          <a:p>
+            <a:pPr>
+              <a:spcAft>
+                <a:spcPts val="1200"/>
+              </a:spcAft>
+              <a:defRPr sz="1800">
+                <a:solidFill>
+                  <a:srgbClr val="333333"/>
+                </a:solidFill>
+              </a:defRPr>
+            </a:pPr>
+            <a:r>
+              <a:t>• </a:t>
+            </a:r>
+          </a:p>
+          <a:p>
+            <a:pPr>
+              <a:spcAft>
+                <a:spcPts val="1200"/>
+              </a:spcAft>
+              <a:defRPr sz="1800">
+                <a:solidFill>
+                  <a:srgbClr val="333333"/>
+                </a:solidFill>
+              </a:defRPr>
+            </a:pPr>
+            <a:r>
+              <a:t>• Timeline: 18 months core  |  Budget: Rs 45-55 lakhs</a:t>
+            </a:r>
+          </a:p>
+          <a:p>
+            <a:pPr>
+              <a:spcAft>
+                <a:spcPts val="1200"/>
+              </a:spcAft>
+              <a:defRPr sz="1800">
+                <a:solidFill>
+                  <a:srgbClr val="333333"/>
+                </a:solidFill>
+              </a:defRPr>
+            </a:pPr>
+            <a:r>
+              <a:t>• Expected: reduce parameter uncertainty from +/-50% to +/-15-20%</a:t>
+            </a:r>
+          </a:p>
+        </p:txBody>
+      </p:sp>
+      <p:sp>
+        <p:nvSpPr>
+          <p:cNvPr id="4" name="TextBox 3"/>
+          <p:cNvSpPr txBox="1"/>
+          <p:nvPr/>
+        </p:nvSpPr>
+        <p:spPr>
+          <a:xfrm>
+            <a:off x="457200" y="4572000"/>
+            <a:ext cx="8229600" cy="548640"/>
+          </a:xfrm>
+          <a:prstGeom prst="rect">
+            <a:avLst/>
+          </a:prstGeom>
+          <a:noFill/>
+        </p:spPr>
+        <p:txBody>
+          <a:bodyPr wrap="square">
+            <a:spAutoFit/>
+          </a:bodyPr>
+          <a:lstStyle/>
+          <a:p>
+            <a:pPr>
+              <a:defRPr sz="1400" i="1">
+                <a:solidFill>
+                  <a:srgbClr val="4A90D9"/>
+                </a:solidFill>
+              </a:defRPr>
+            </a:pPr>
+            <a:r>
+              <a:t>💡 One investment (Rs 45-55L) closes 7 of 8 evidence gaps simultaneously. This is the single most cost-effective next step.</a:t>
             </a:r>
           </a:p>
         </p:txBody>
@@ -6192,6 +8020,2622 @@
             </a:pPr>
             <a:r>
               <a:t>💡 BCR = Benefit-Cost Ratio. A BCR of 13.5:1 means every Rs 1 invested generates Rs 13.5 in lifetime benefits.</a:t>
+            </a:r>
+          </a:p>
+        </p:txBody>
+      </p:sp>
+    </p:spTree>
+  </p:cSld>
+  <p:clrMapOvr>
+    <a:masterClrMapping/>
+  </p:clrMapOvr>
+</p:sld>
+</file>
+
+<file path=ppt/slides/slide20.xml><?xml version="1.0" encoding="utf-8"?>
+<p:sld xmlns:a="http://schemas.openxmlformats.org/drawingml/2006/main" xmlns:p="http://schemas.openxmlformats.org/presentationml/2006/main" xmlns:r="http://schemas.openxmlformats.org/officeDocument/2006/relationships">
+  <p:cSld>
+    <p:spTree>
+      <p:nvGrpSpPr>
+        <p:cNvPr id="1" name=""/>
+        <p:cNvGrpSpPr/>
+        <p:nvPr/>
+      </p:nvGrpSpPr>
+      <p:grpSpPr/>
+      <p:sp>
+        <p:nvSpPr>
+          <p:cNvPr id="2" name="TextBox 1"/>
+          <p:cNvSpPr txBox="1"/>
+          <p:nvPr/>
+        </p:nvSpPr>
+        <p:spPr>
+          <a:xfrm>
+            <a:off x="457200" y="274320"/>
+            <a:ext cx="8229600" cy="731520"/>
+          </a:xfrm>
+          <a:prstGeom prst="rect">
+            <a:avLst/>
+          </a:prstGeom>
+          <a:noFill/>
+        </p:spPr>
+        <p:txBody>
+          <a:bodyPr wrap="none">
+            <a:spAutoFit/>
+          </a:bodyPr>
+          <a:lstStyle/>
+          <a:p>
+            <a:pPr>
+              <a:defRPr sz="2800" b="1">
+                <a:solidFill>
+                  <a:srgbClr val="1A568C"/>
+                </a:solidFill>
+              </a:defRPr>
+            </a:pPr>
+            <a:r>
+              <a:t>Policy Persistence: Multi-Cohort Impact (Illustrative)</a:t>
+            </a:r>
+          </a:p>
+        </p:txBody>
+      </p:sp>
+      <p:graphicFrame>
+        <p:nvGraphicFramePr>
+          <p:cNvPr id="3" name="Table 2"/>
+          <p:cNvGraphicFramePr>
+            <a:graphicFrameLocks noGrp="1"/>
+          </p:cNvGraphicFramePr>
+          <p:nvPr/>
+        </p:nvGraphicFramePr>
+        <p:xfrm>
+          <a:off x="457200" y="1188720"/>
+          <a:ext cx="8229600" cy="1828800"/>
+        </p:xfrm>
+        <a:graphic>
+          <a:graphicData uri="http://schemas.openxmlformats.org/drawingml/2006/table">
+            <a:tbl>
+              <a:tblPr firstRow="1" bandRow="1">
+                <a:tableStyleId>{5C22544A-7EE6-4342-B048-85BDC9FD1C3A}</a:tableStyleId>
+              </a:tblPr>
+              <a:tblGrid>
+                <a:gridCol w="1645920"/>
+                <a:gridCol w="1645920"/>
+                <a:gridCol w="1645920"/>
+                <a:gridCol w="1645920"/>
+                <a:gridCol w="1645920"/>
+              </a:tblGrid>
+              <a:tr h="457200">
+                <a:tc>
+                  <a:txBody>
+                    <a:bodyPr/>
+                    <a:lstStyle/>
+                    <a:p>
+                      <a:pPr algn="ctr">
+                        <a:defRPr b="1" sz="1400">
+                          <a:solidFill>
+                            <a:srgbClr val="FFFFFF"/>
+                          </a:solidFill>
+                        </a:defRPr>
+                      </a:pPr>
+                      <a:r>
+                        <a:t>Scenario</a:t>
+                      </a:r>
+                    </a:p>
+                  </a:txBody>
+                  <a:tcPr>
+                    <a:solidFill>
+                      <a:srgbClr val="1A568C"/>
+                    </a:solidFill>
+                  </a:tcPr>
+                </a:tc>
+                <a:tc>
+                  <a:txBody>
+                    <a:bodyPr/>
+                    <a:lstStyle/>
+                    <a:p>
+                      <a:pPr algn="ctr">
+                        <a:defRPr b="1" sz="1400">
+                          <a:solidFill>
+                            <a:srgbClr val="FFFFFF"/>
+                          </a:solidFill>
+                        </a:defRPr>
+                      </a:pPr>
+                      <a:r>
+                        <a:t>Years Post-Exit</a:t>
+                      </a:r>
+                    </a:p>
+                  </a:txBody>
+                  <a:tcPr>
+                    <a:solidFill>
+                      <a:srgbClr val="1A568C"/>
+                    </a:solidFill>
+                  </a:tcPr>
+                </a:tc>
+                <a:tc>
+                  <a:txBody>
+                    <a:bodyPr/>
+                    <a:lstStyle/>
+                    <a:p>
+                      <a:pPr algn="ctr">
+                        <a:defRPr b="1" sz="1400">
+                          <a:solidFill>
+                            <a:srgbClr val="FFFFFF"/>
+                          </a:solidFill>
+                        </a:defRPr>
+                      </a:pPr>
+                      <a:r>
+                        <a:t>Attribution</a:t>
+                      </a:r>
+                    </a:p>
+                  </a:txBody>
+                  <a:tcPr>
+                    <a:solidFill>
+                      <a:srgbClr val="1A568C"/>
+                    </a:solidFill>
+                  </a:tcPr>
+                </a:tc>
+                <a:tc>
+                  <a:txBody>
+                    <a:bodyPr/>
+                    <a:lstStyle/>
+                    <a:p>
+                      <a:pPr algn="ctr">
+                        <a:defRPr b="1" sz="1400">
+                          <a:solidFill>
+                            <a:srgbClr val="FFFFFF"/>
+                          </a:solidFill>
+                        </a:defRPr>
+                      </a:pPr>
+                      <a:r>
+                        <a:t>Multiplier</a:t>
+                      </a:r>
+                    </a:p>
+                  </a:txBody>
+                  <a:tcPr>
+                    <a:solidFill>
+                      <a:srgbClr val="1A568C"/>
+                    </a:solidFill>
+                  </a:tcPr>
+                </a:tc>
+                <a:tc>
+                  <a:txBody>
+                    <a:bodyPr/>
+                    <a:lstStyle/>
+                    <a:p>
+                      <a:pPr algn="ctr">
+                        <a:defRPr b="1" sz="1400">
+                          <a:solidFill>
+                            <a:srgbClr val="FFFFFF"/>
+                          </a:solidFill>
+                        </a:defRPr>
+                      </a:pPr>
+                      <a:r>
+                        <a:t>Effective BCR (RTE)</a:t>
+                      </a:r>
+                    </a:p>
+                  </a:txBody>
+                  <a:tcPr>
+                    <a:solidFill>
+                      <a:srgbClr val="1A568C"/>
+                    </a:solidFill>
+                  </a:tcPr>
+                </a:tc>
+              </a:tr>
+              <a:tr h="457200">
+                <a:tc>
+                  <a:txBody>
+                    <a:bodyPr/>
+                    <a:lstStyle/>
+                    <a:p>
+                      <a:pPr algn="ctr">
+                        <a:defRPr sz="1300">
+                          <a:solidFill>
+                            <a:srgbClr val="333333"/>
+                          </a:solidFill>
+                        </a:defRPr>
+                      </a:pPr>
+                      <a:r>
+                        <a:t>Conservative</a:t>
+                      </a:r>
+                    </a:p>
+                  </a:txBody>
+                  <a:tcPr>
+                    <a:solidFill>
+                      <a:srgbClr val="F5F5F5"/>
+                    </a:solidFill>
+                  </a:tcPr>
+                </a:tc>
+                <a:tc>
+                  <a:txBody>
+                    <a:bodyPr/>
+                    <a:lstStyle/>
+                    <a:p>
+                      <a:pPr algn="ctr">
+                        <a:defRPr sz="1300">
+                          <a:solidFill>
+                            <a:srgbClr val="333333"/>
+                          </a:solidFill>
+                        </a:defRPr>
+                      </a:pPr>
+                      <a:r>
+                        <a:t>5 yrs</a:t>
+                      </a:r>
+                    </a:p>
+                  </a:txBody>
+                  <a:tcPr>
+                    <a:solidFill>
+                      <a:srgbClr val="F5F5F5"/>
+                    </a:solidFill>
+                  </a:tcPr>
+                </a:tc>
+                <a:tc>
+                  <a:txBody>
+                    <a:bodyPr/>
+                    <a:lstStyle/>
+                    <a:p>
+                      <a:pPr algn="ctr">
+                        <a:defRPr sz="1300">
+                          <a:solidFill>
+                            <a:srgbClr val="333333"/>
+                          </a:solidFill>
+                        </a:defRPr>
+                      </a:pPr>
+                      <a:r>
+                        <a:t>20%</a:t>
+                      </a:r>
+                    </a:p>
+                  </a:txBody>
+                  <a:tcPr>
+                    <a:solidFill>
+                      <a:srgbClr val="F5F5F5"/>
+                    </a:solidFill>
+                  </a:tcPr>
+                </a:tc>
+                <a:tc>
+                  <a:txBody>
+                    <a:bodyPr/>
+                    <a:lstStyle/>
+                    <a:p>
+                      <a:pPr algn="ctr">
+                        <a:defRPr sz="1300">
+                          <a:solidFill>
+                            <a:srgbClr val="333333"/>
+                          </a:solidFill>
+                        </a:defRPr>
+                      </a:pPr>
+                      <a:r>
+                        <a:t>1.86x</a:t>
+                      </a:r>
+                    </a:p>
+                  </a:txBody>
+                  <a:tcPr>
+                    <a:solidFill>
+                      <a:srgbClr val="F5F5F5"/>
+                    </a:solidFill>
+                  </a:tcPr>
+                </a:tc>
+                <a:tc>
+                  <a:txBody>
+                    <a:bodyPr/>
+                    <a:lstStyle/>
+                    <a:p>
+                      <a:pPr algn="ctr">
+                        <a:defRPr sz="1300">
+                          <a:solidFill>
+                            <a:srgbClr val="333333"/>
+                          </a:solidFill>
+                        </a:defRPr>
+                      </a:pPr>
+                      <a:r>
+                        <a:t>10.2x</a:t>
+                      </a:r>
+                    </a:p>
+                  </a:txBody>
+                  <a:tcPr>
+                    <a:solidFill>
+                      <a:srgbClr val="F5F5F5"/>
+                    </a:solidFill>
+                  </a:tcPr>
+                </a:tc>
+              </a:tr>
+              <a:tr h="457200">
+                <a:tc>
+                  <a:txBody>
+                    <a:bodyPr/>
+                    <a:lstStyle/>
+                    <a:p>
+                      <a:pPr algn="ctr">
+                        <a:defRPr sz="1300">
+                          <a:solidFill>
+                            <a:srgbClr val="333333"/>
+                          </a:solidFill>
+                        </a:defRPr>
+                      </a:pPr>
+                      <a:r>
+                        <a:t>Moderate</a:t>
+                      </a:r>
+                    </a:p>
+                  </a:txBody>
+                  <a:tcPr/>
+                </a:tc>
+                <a:tc>
+                  <a:txBody>
+                    <a:bodyPr/>
+                    <a:lstStyle/>
+                    <a:p>
+                      <a:pPr algn="ctr">
+                        <a:defRPr sz="1300">
+                          <a:solidFill>
+                            <a:srgbClr val="333333"/>
+                          </a:solidFill>
+                        </a:defRPr>
+                      </a:pPr>
+                      <a:r>
+                        <a:t>10 yrs</a:t>
+                      </a:r>
+                    </a:p>
+                  </a:txBody>
+                  <a:tcPr/>
+                </a:tc>
+                <a:tc>
+                  <a:txBody>
+                    <a:bodyPr/>
+                    <a:lstStyle/>
+                    <a:p>
+                      <a:pPr algn="ctr">
+                        <a:defRPr sz="1300">
+                          <a:solidFill>
+                            <a:srgbClr val="333333"/>
+                          </a:solidFill>
+                        </a:defRPr>
+                      </a:pPr>
+                      <a:r>
+                        <a:t>40%</a:t>
+                      </a:r>
+                    </a:p>
+                  </a:txBody>
+                  <a:tcPr/>
+                </a:tc>
+                <a:tc>
+                  <a:txBody>
+                    <a:bodyPr/>
+                    <a:lstStyle/>
+                    <a:p>
+                      <a:pPr algn="ctr">
+                        <a:defRPr sz="1300">
+                          <a:solidFill>
+                            <a:srgbClr val="333333"/>
+                          </a:solidFill>
+                        </a:defRPr>
+                      </a:pPr>
+                      <a:r>
+                        <a:t>4.40x</a:t>
+                      </a:r>
+                    </a:p>
+                  </a:txBody>
+                  <a:tcPr/>
+                </a:tc>
+                <a:tc>
+                  <a:txBody>
+                    <a:bodyPr/>
+                    <a:lstStyle/>
+                    <a:p>
+                      <a:pPr algn="ctr">
+                        <a:defRPr sz="1300">
+                          <a:solidFill>
+                            <a:srgbClr val="333333"/>
+                          </a:solidFill>
+                        </a:defRPr>
+                      </a:pPr>
+                      <a:r>
+                        <a:t>62.9x</a:t>
+                      </a:r>
+                    </a:p>
+                  </a:txBody>
+                  <a:tcPr/>
+                </a:tc>
+              </a:tr>
+              <a:tr h="457200">
+                <a:tc>
+                  <a:txBody>
+                    <a:bodyPr/>
+                    <a:lstStyle/>
+                    <a:p>
+                      <a:pPr algn="ctr">
+                        <a:defRPr sz="1300">
+                          <a:solidFill>
+                            <a:srgbClr val="333333"/>
+                          </a:solidFill>
+                        </a:defRPr>
+                      </a:pPr>
+                      <a:r>
+                        <a:t>Optimistic</a:t>
+                      </a:r>
+                    </a:p>
+                  </a:txBody>
+                  <a:tcPr>
+                    <a:solidFill>
+                      <a:srgbClr val="F5F5F5"/>
+                    </a:solidFill>
+                  </a:tcPr>
+                </a:tc>
+                <a:tc>
+                  <a:txBody>
+                    <a:bodyPr/>
+                    <a:lstStyle/>
+                    <a:p>
+                      <a:pPr algn="ctr">
+                        <a:defRPr sz="1300">
+                          <a:solidFill>
+                            <a:srgbClr val="333333"/>
+                          </a:solidFill>
+                        </a:defRPr>
+                      </a:pPr>
+                      <a:r>
+                        <a:t>15 yrs</a:t>
+                      </a:r>
+                    </a:p>
+                  </a:txBody>
+                  <a:tcPr>
+                    <a:solidFill>
+                      <a:srgbClr val="F5F5F5"/>
+                    </a:solidFill>
+                  </a:tcPr>
+                </a:tc>
+                <a:tc>
+                  <a:txBody>
+                    <a:bodyPr/>
+                    <a:lstStyle/>
+                    <a:p>
+                      <a:pPr algn="ctr">
+                        <a:defRPr sz="1300">
+                          <a:solidFill>
+                            <a:srgbClr val="333333"/>
+                          </a:solidFill>
+                        </a:defRPr>
+                      </a:pPr>
+                      <a:r>
+                        <a:t>60%</a:t>
+                      </a:r>
+                    </a:p>
+                  </a:txBody>
+                  <a:tcPr>
+                    <a:solidFill>
+                      <a:srgbClr val="F5F5F5"/>
+                    </a:solidFill>
+                  </a:tcPr>
+                </a:tc>
+                <a:tc>
+                  <a:txBody>
+                    <a:bodyPr/>
+                    <a:lstStyle/>
+                    <a:p>
+                      <a:pPr algn="ctr">
+                        <a:defRPr sz="1300">
+                          <a:solidFill>
+                            <a:srgbClr val="333333"/>
+                          </a:solidFill>
+                        </a:defRPr>
+                      </a:pPr>
+                      <a:r>
+                        <a:t>9.31x</a:t>
+                      </a:r>
+                    </a:p>
+                  </a:txBody>
+                  <a:tcPr>
+                    <a:solidFill>
+                      <a:srgbClr val="F5F5F5"/>
+                    </a:solidFill>
+                  </a:tcPr>
+                </a:tc>
+                <a:tc>
+                  <a:txBody>
+                    <a:bodyPr/>
+                    <a:lstStyle/>
+                    <a:p>
+                      <a:pPr algn="ctr">
+                        <a:defRPr sz="1300">
+                          <a:solidFill>
+                            <a:srgbClr val="333333"/>
+                          </a:solidFill>
+                        </a:defRPr>
+                      </a:pPr>
+                      <a:r>
+                        <a:t>395.0x</a:t>
+                      </a:r>
+                    </a:p>
+                  </a:txBody>
+                  <a:tcPr>
+                    <a:solidFill>
+                      <a:srgbClr val="F5F5F5"/>
+                    </a:solidFill>
+                  </a:tcPr>
+                </a:tc>
+              </a:tr>
+            </a:tbl>
+          </a:graphicData>
+        </a:graphic>
+      </p:graphicFrame>
+      <p:sp>
+        <p:nvSpPr>
+          <p:cNvPr id="4" name="TextBox 3"/>
+          <p:cNvSpPr txBox="1"/>
+          <p:nvPr/>
+        </p:nvSpPr>
+        <p:spPr>
+          <a:xfrm>
+            <a:off x="457200" y="4572000"/>
+            <a:ext cx="8229600" cy="548640"/>
+          </a:xfrm>
+          <a:prstGeom prst="rect">
+            <a:avLst/>
+          </a:prstGeom>
+          <a:noFill/>
+        </p:spPr>
+        <p:txBody>
+          <a:bodyPr wrap="square">
+            <a:spAutoFit/>
+          </a:bodyPr>
+          <a:lstStyle/>
+          <a:p>
+            <a:pPr>
+              <a:defRPr sz="1400" i="1">
+                <a:solidFill>
+                  <a:srgbClr val="4A90D9"/>
+                </a:solidFill>
+              </a:defRPr>
+            </a:pPr>
+            <a:r>
+              <a:t>💡 ILLUSTRATIVE ONLY: Attribution fractions have no empirical basis. Shows how persistence compounds value — single-cohort BCR is a conservative floor.</a:t>
+            </a:r>
+          </a:p>
+        </p:txBody>
+      </p:sp>
+    </p:spTree>
+  </p:cSld>
+  <p:clrMapOvr>
+    <a:masterClrMapping/>
+  </p:clrMapOvr>
+</p:sld>
+</file>
+
+<file path=ppt/slides/slide21.xml><?xml version="1.0" encoding="utf-8"?>
+<p:sld xmlns:a="http://schemas.openxmlformats.org/drawingml/2006/main" xmlns:p="http://schemas.openxmlformats.org/presentationml/2006/main" xmlns:r="http://schemas.openxmlformats.org/officeDocument/2006/relationships">
+  <p:cSld>
+    <p:spTree>
+      <p:nvGrpSpPr>
+        <p:cNvPr id="1" name=""/>
+        <p:cNvGrpSpPr/>
+        <p:nvPr/>
+      </p:nvGrpSpPr>
+      <p:grpSpPr/>
+      <p:sp>
+        <p:nvSpPr>
+          <p:cNvPr id="2" name="TextBox 1"/>
+          <p:cNvSpPr txBox="1"/>
+          <p:nvPr/>
+        </p:nvSpPr>
+        <p:spPr>
+          <a:xfrm>
+            <a:off x="457200" y="274320"/>
+            <a:ext cx="8229600" cy="731520"/>
+          </a:xfrm>
+          <a:prstGeom prst="rect">
+            <a:avLst/>
+          </a:prstGeom>
+          <a:noFill/>
+        </p:spPr>
+        <p:txBody>
+          <a:bodyPr wrap="none">
+            <a:spAutoFit/>
+          </a:bodyPr>
+          <a:lstStyle/>
+          <a:p>
+            <a:pPr>
+              <a:defRPr sz="2800" b="1">
+                <a:solidFill>
+                  <a:srgbClr val="1A568C"/>
+                </a:solidFill>
+              </a:defRPr>
+            </a:pPr>
+            <a:r>
+              <a:t>Ask &amp; Next Steps</a:t>
+            </a:r>
+          </a:p>
+        </p:txBody>
+      </p:sp>
+      <p:sp>
+        <p:nvSpPr>
+          <p:cNvPr id="3" name="TextBox 2"/>
+          <p:cNvSpPr txBox="1"/>
+          <p:nvPr/>
+        </p:nvSpPr>
+        <p:spPr>
+          <a:xfrm>
+            <a:off x="457200" y="1188720"/>
+            <a:ext cx="8229600" cy="3657600"/>
+          </a:xfrm>
+          <a:prstGeom prst="rect">
+            <a:avLst/>
+          </a:prstGeom>
+          <a:noFill/>
+        </p:spPr>
+        <p:txBody>
+          <a:bodyPr wrap="square">
+            <a:spAutoFit/>
+          </a:bodyPr>
+          <a:lstStyle/>
+          <a:p>
+            <a:pPr>
+              <a:spcAft>
+                <a:spcPts val="1200"/>
+              </a:spcAft>
+              <a:defRPr sz="1800">
+                <a:solidFill>
+                  <a:srgbClr val="333333"/>
+                </a:solidFill>
+              </a:defRPr>
+            </a:pPr>
+            <a:r>
+              <a:t>• 1. Approve tracer study launch (Rs 45-55L, 18 months)</a:t>
+            </a:r>
+          </a:p>
+          <a:p>
+            <a:pPr>
+              <a:spcAft>
+                <a:spcPts val="1200"/>
+              </a:spcAft>
+              <a:defRPr sz="1800">
+                <a:solidFill>
+                  <a:srgbClr val="333333"/>
+                </a:solidFill>
+              </a:defRPr>
+            </a:pPr>
+            <a:r>
+              <a:t>•    -&gt; Validates the 3 LOW-confidence parameters that drive BCR</a:t>
+            </a:r>
+          </a:p>
+          <a:p>
+            <a:pPr>
+              <a:spcAft>
+                <a:spcPts val="1200"/>
+              </a:spcAft>
+              <a:defRPr sz="1800">
+                <a:solidFill>
+                  <a:srgbClr val="333333"/>
+                </a:solidFill>
+              </a:defRPr>
+            </a:pPr>
+            <a:r>
+              <a:t>• </a:t>
+            </a:r>
+          </a:p>
+          <a:p>
+            <a:pPr>
+              <a:spcAft>
+                <a:spcPts val="1200"/>
+              </a:spcAft>
+              <a:defRPr sz="1800">
+                <a:solidFill>
+                  <a:srgbClr val="333333"/>
+                </a:solidFill>
+              </a:defRPr>
+            </a:pPr>
+            <a:r>
+              <a:t>• 2. Request actual cost data (RWF direct spend per beneficiary)</a:t>
+            </a:r>
+          </a:p>
+          <a:p>
+            <a:pPr>
+              <a:spcAft>
+                <a:spcPts val="1200"/>
+              </a:spcAft>
+              <a:defRPr sz="1800">
+                <a:solidFill>
+                  <a:srgbClr val="333333"/>
+                </a:solidFill>
+              </a:defRPr>
+            </a:pPr>
+            <a:r>
+              <a:t>•    -&gt; Enables precise RWF-only BCR calculation</a:t>
+            </a:r>
+          </a:p>
+          <a:p>
+            <a:pPr>
+              <a:spcAft>
+                <a:spcPts val="1200"/>
+              </a:spcAft>
+              <a:defRPr sz="1800">
+                <a:solidFill>
+                  <a:srgbClr val="333333"/>
+                </a:solidFill>
+              </a:defRPr>
+            </a:pPr>
+            <a:r>
+              <a:t>• </a:t>
+            </a:r>
+          </a:p>
+          <a:p>
+            <a:pPr>
+              <a:spcAft>
+                <a:spcPts val="1200"/>
+              </a:spcAft>
+              <a:defRPr sz="1800">
+                <a:solidFill>
+                  <a:srgbClr val="333333"/>
+                </a:solidFill>
+              </a:defRPr>
+            </a:pPr>
+            <a:r>
+              <a:t>• 3. Re-query 68% placement rate by gender (1-2 weeks, near-zero cost)</a:t>
+            </a:r>
+          </a:p>
+          <a:p>
+            <a:pPr>
+              <a:spcAft>
+                <a:spcPts val="1200"/>
+              </a:spcAft>
+              <a:defRPr sz="1800">
+                <a:solidFill>
+                  <a:srgbClr val="333333"/>
+                </a:solidFill>
+              </a:defRPr>
+            </a:pPr>
+            <a:r>
+              <a:t>•    -&gt; Immediate model improvement</a:t>
+            </a:r>
+          </a:p>
+          <a:p>
+            <a:pPr>
+              <a:spcAft>
+                <a:spcPts val="1200"/>
+              </a:spcAft>
+              <a:defRPr sz="1800">
+                <a:solidFill>
+                  <a:srgbClr val="333333"/>
+                </a:solidFill>
+              </a:defRPr>
+            </a:pPr>
+            <a:r>
+              <a:t>• </a:t>
+            </a:r>
+          </a:p>
+          <a:p>
+            <a:pPr>
+              <a:spcAft>
+                <a:spcPts val="1200"/>
+              </a:spcAft>
+              <a:defRPr sz="1800">
+                <a:solidFill>
+                  <a:srgbClr val="333333"/>
+                </a:solidFill>
+              </a:defRPr>
+            </a:pPr>
+            <a:r>
+              <a:t>• 4. Microdata access: PLFS unit records + RWF beneficiary contact database</a:t>
+            </a:r>
+          </a:p>
+          <a:p>
+            <a:pPr>
+              <a:spcAft>
+                <a:spcPts val="1200"/>
+              </a:spcAft>
+              <a:defRPr sz="1800">
+                <a:solidFill>
+                  <a:srgbClr val="333333"/>
+                </a:solidFill>
+              </a:defRPr>
+            </a:pPr>
+            <a:r>
+              <a:t>•    -&gt; Needed for tracer sampling frame and enhanced calibration</a:t>
+            </a:r>
+          </a:p>
+          <a:p>
+            <a:pPr>
+              <a:spcAft>
+                <a:spcPts val="1200"/>
+              </a:spcAft>
+              <a:defRPr sz="1800">
+                <a:solidFill>
+                  <a:srgbClr val="333333"/>
+                </a:solidFill>
+              </a:defRPr>
+            </a:pPr>
+            <a:r>
+              <a:t>• </a:t>
+            </a:r>
+          </a:p>
+          <a:p>
+            <a:pPr>
+              <a:spcAft>
+                <a:spcPts val="1200"/>
+              </a:spcAft>
+              <a:defRPr sz="1800">
+                <a:solidFill>
+                  <a:srgbClr val="333333"/>
+                </a:solidFill>
+              </a:defRPr>
+            </a:pPr>
+            <a:r>
+              <a:t>• 5. Pilot lightweight exit survey for next 2-3 completing cohorts</a:t>
+            </a:r>
+          </a:p>
+          <a:p>
+            <a:pPr>
+              <a:spcAft>
+                <a:spcPts val="1200"/>
+              </a:spcAft>
+              <a:defRPr sz="1800">
+                <a:solidFill>
+                  <a:srgbClr val="333333"/>
+                </a:solidFill>
+              </a:defRPr>
+            </a:pPr>
+            <a:r>
+              <a:t>•    -&gt; Generates gender-disaggregated data before tracer results arrive</a:t>
+            </a:r>
+          </a:p>
+        </p:txBody>
+      </p:sp>
+    </p:spTree>
+  </p:cSld>
+  <p:clrMapOvr>
+    <a:masterClrMapping/>
+  </p:clrMapOvr>
+</p:sld>
+</file>
+
+<file path=ppt/slides/slide22.xml><?xml version="1.0" encoding="utf-8"?>
+<p:sld xmlns:a="http://schemas.openxmlformats.org/drawingml/2006/main" xmlns:p="http://schemas.openxmlformats.org/presentationml/2006/main" xmlns:r="http://schemas.openxmlformats.org/officeDocument/2006/relationships">
+  <p:cSld>
+    <p:spTree>
+      <p:nvGrpSpPr>
+        <p:cNvPr id="1" name=""/>
+        <p:cNvGrpSpPr/>
+        <p:nvPr/>
+      </p:nvGrpSpPr>
+      <p:grpSpPr/>
+      <p:sp>
+        <p:nvSpPr>
+          <p:cNvPr id="2" name="TextBox 1"/>
+          <p:cNvSpPr txBox="1"/>
+          <p:nvPr/>
+        </p:nvSpPr>
+        <p:spPr>
+          <a:xfrm>
+            <a:off x="457200" y="274320"/>
+            <a:ext cx="8229600" cy="731520"/>
+          </a:xfrm>
+          <a:prstGeom prst="rect">
+            <a:avLst/>
+          </a:prstGeom>
+          <a:noFill/>
+        </p:spPr>
+        <p:txBody>
+          <a:bodyPr wrap="none">
+            <a:spAutoFit/>
+          </a:bodyPr>
+          <a:lstStyle/>
+          <a:p>
+            <a:pPr>
+              <a:defRPr sz="2800" b="1">
+                <a:solidFill>
+                  <a:srgbClr val="1A568C"/>
+                </a:solidFill>
+              </a:defRPr>
+            </a:pPr>
+            <a:r>
+              <a:t>Decision Framework: Which Intervention When?</a:t>
+            </a:r>
+          </a:p>
+        </p:txBody>
+      </p:sp>
+      <p:graphicFrame>
+        <p:nvGraphicFramePr>
+          <p:cNvPr id="3" name="Table 2"/>
+          <p:cNvGraphicFramePr>
+            <a:graphicFrameLocks noGrp="1"/>
+          </p:cNvGraphicFramePr>
+          <p:nvPr/>
+        </p:nvGraphicFramePr>
+        <p:xfrm>
+          <a:off x="457200" y="1188720"/>
+          <a:ext cx="6035040" cy="2743200"/>
+        </p:xfrm>
+        <a:graphic>
+          <a:graphicData uri="http://schemas.openxmlformats.org/drawingml/2006/table">
+            <a:tbl>
+              <a:tblPr firstRow="1" bandRow="1">
+                <a:tableStyleId>{5C22544A-7EE6-4342-B048-85BDC9FD1C3A}</a:tableStyleId>
+              </a:tblPr>
+              <a:tblGrid>
+                <a:gridCol w="2011680"/>
+                <a:gridCol w="2011680"/>
+                <a:gridCol w="2011680"/>
+              </a:tblGrid>
+              <a:tr h="457200">
+                <a:tc>
+                  <a:txBody>
+                    <a:bodyPr/>
+                    <a:lstStyle/>
+                    <a:p>
+                      <a:pPr algn="ctr">
+                        <a:defRPr b="1" sz="1400">
+                          <a:solidFill>
+                            <a:srgbClr val="FFFFFF"/>
+                          </a:solidFill>
+                        </a:defRPr>
+                      </a:pPr>
+                      <a:r>
+                        <a:t>If your priority is...</a:t>
+                      </a:r>
+                    </a:p>
+                  </a:txBody>
+                  <a:tcPr>
+                    <a:solidFill>
+                      <a:srgbClr val="1A568C"/>
+                    </a:solidFill>
+                  </a:tcPr>
+                </a:tc>
+                <a:tc>
+                  <a:txBody>
+                    <a:bodyPr/>
+                    <a:lstStyle/>
+                    <a:p>
+                      <a:pPr algn="ctr">
+                        <a:defRPr b="1" sz="1400">
+                          <a:solidFill>
+                            <a:srgbClr val="FFFFFF"/>
+                          </a:solidFill>
+                        </a:defRPr>
+                      </a:pPr>
+                      <a:r>
+                        <a:t>Consider...</a:t>
+                      </a:r>
+                    </a:p>
+                  </a:txBody>
+                  <a:tcPr>
+                    <a:solidFill>
+                      <a:srgbClr val="1A568C"/>
+                    </a:solidFill>
+                  </a:tcPr>
+                </a:tc>
+                <a:tc>
+                  <a:txBody>
+                    <a:bodyPr/>
+                    <a:lstStyle/>
+                    <a:p>
+                      <a:pPr algn="ctr">
+                        <a:defRPr b="1" sz="1400">
+                          <a:solidFill>
+                            <a:srgbClr val="FFFFFF"/>
+                          </a:solidFill>
+                        </a:defRPr>
+                      </a:pPr>
+                      <a:r>
+                        <a:t>Because...</a:t>
+                      </a:r>
+                    </a:p>
+                  </a:txBody>
+                  <a:tcPr>
+                    <a:solidFill>
+                      <a:srgbClr val="1A568C"/>
+                    </a:solidFill>
+                  </a:tcPr>
+                </a:tc>
+              </a:tr>
+              <a:tr h="457200">
+                <a:tc>
+                  <a:txBody>
+                    <a:bodyPr/>
+                    <a:lstStyle/>
+                    <a:p>
+                      <a:pPr algn="ctr">
+                        <a:defRPr sz="1300">
+                          <a:solidFill>
+                            <a:srgbClr val="333333"/>
+                          </a:solidFill>
+                        </a:defRPr>
+                      </a:pPr>
+                      <a:r>
+                        <a:t>Max per-beneficiary impact</a:t>
+                      </a:r>
+                    </a:p>
+                  </a:txBody>
+                  <a:tcPr>
+                    <a:solidFill>
+                      <a:srgbClr val="F5F5F5"/>
+                    </a:solidFill>
+                  </a:tcPr>
+                </a:tc>
+                <a:tc>
+                  <a:txBody>
+                    <a:bodyPr/>
+                    <a:lstStyle/>
+                    <a:p>
+                      <a:pPr algn="ctr">
+                        <a:defRPr sz="1300">
+                          <a:solidFill>
+                            <a:srgbClr val="333333"/>
+                          </a:solidFill>
+                        </a:defRPr>
+                      </a:pPr>
+                      <a:r>
+                        <a:t>Apprenticeship</a:t>
+                      </a:r>
+                    </a:p>
+                  </a:txBody>
+                  <a:tcPr>
+                    <a:solidFill>
+                      <a:srgbClr val="F5F5F5"/>
+                    </a:solidFill>
+                  </a:tcPr>
+                </a:tc>
+                <a:tc>
+                  <a:txBody>
+                    <a:bodyPr/>
+                    <a:lstStyle/>
+                    <a:p>
+                      <a:pPr algn="ctr">
+                        <a:defRPr sz="1300">
+                          <a:solidFill>
+                            <a:srgbClr val="333333"/>
+                          </a:solidFill>
+                        </a:defRPr>
+                      </a:pPr>
+                      <a:r>
+                        <a:t>2.5× higher LNPV</a:t>
+                      </a:r>
+                    </a:p>
+                  </a:txBody>
+                  <a:tcPr>
+                    <a:solidFill>
+                      <a:srgbClr val="F5F5F5"/>
+                    </a:solidFill>
+                  </a:tcPr>
+                </a:tc>
+              </a:tr>
+              <a:tr h="457200">
+                <a:tc>
+                  <a:txBody>
+                    <a:bodyPr/>
+                    <a:lstStyle/>
+                    <a:p>
+                      <a:pPr algn="ctr">
+                        <a:defRPr sz="1300">
+                          <a:solidFill>
+                            <a:srgbClr val="333333"/>
+                          </a:solidFill>
+                        </a:defRPr>
+                      </a:pPr>
+                      <a:r>
+                        <a:t>Max reach with limited budget</a:t>
+                      </a:r>
+                    </a:p>
+                  </a:txBody>
+                  <a:tcPr/>
+                </a:tc>
+                <a:tc>
+                  <a:txBody>
+                    <a:bodyPr/>
+                    <a:lstStyle/>
+                    <a:p>
+                      <a:pPr algn="ctr">
+                        <a:defRPr sz="1300">
+                          <a:solidFill>
+                            <a:srgbClr val="333333"/>
+                          </a:solidFill>
+                        </a:defRPr>
+                      </a:pPr>
+                      <a:r>
+                        <a:t>RTE</a:t>
+                      </a:r>
+                    </a:p>
+                  </a:txBody>
+                  <a:tcPr/>
+                </a:tc>
+                <a:tc>
+                  <a:txBody>
+                    <a:bodyPr/>
+                    <a:lstStyle/>
+                    <a:p>
+                      <a:pPr algn="ctr">
+                        <a:defRPr sz="1300">
+                          <a:solidFill>
+                            <a:srgbClr val="333333"/>
+                          </a:solidFill>
+                        </a:defRPr>
+                      </a:pPr>
+                      <a:r>
+                        <a:t>Lower cost, simpler delivery</a:t>
+                      </a:r>
+                    </a:p>
+                  </a:txBody>
+                  <a:tcPr/>
+                </a:tc>
+              </a:tr>
+              <a:tr h="457200">
+                <a:tc>
+                  <a:txBody>
+                    <a:bodyPr/>
+                    <a:lstStyle/>
+                    <a:p>
+                      <a:pPr algn="ctr">
+                        <a:defRPr sz="1300">
+                          <a:solidFill>
+                            <a:srgbClr val="333333"/>
+                          </a:solidFill>
+                        </a:defRPr>
+                      </a:pPr>
+                      <a:r>
+                        <a:t>Serve underserved regions</a:t>
+                      </a:r>
+                    </a:p>
+                  </a:txBody>
+                  <a:tcPr>
+                    <a:solidFill>
+                      <a:srgbClr val="F5F5F5"/>
+                    </a:solidFill>
+                  </a:tcPr>
+                </a:tc>
+                <a:tc>
+                  <a:txBody>
+                    <a:bodyPr/>
+                    <a:lstStyle/>
+                    <a:p>
+                      <a:pPr algn="ctr">
+                        <a:defRPr sz="1300">
+                          <a:solidFill>
+                            <a:srgbClr val="333333"/>
+                          </a:solidFill>
+                        </a:defRPr>
+                      </a:pPr>
+                      <a:r>
+                        <a:t>Targeted Apprenticeship</a:t>
+                      </a:r>
+                    </a:p>
+                  </a:txBody>
+                  <a:tcPr>
+                    <a:solidFill>
+                      <a:srgbClr val="F5F5F5"/>
+                    </a:solidFill>
+                  </a:tcPr>
+                </a:tc>
+                <a:tc>
+                  <a:txBody>
+                    <a:bodyPr/>
+                    <a:lstStyle/>
+                    <a:p>
+                      <a:pPr algn="ctr">
+                        <a:defRPr sz="1300">
+                          <a:solidFill>
+                            <a:srgbClr val="333333"/>
+                          </a:solidFill>
+                        </a:defRPr>
+                      </a:pPr>
+                      <a:r>
+                        <a:t>Higher marginal returns</a:t>
+                      </a:r>
+                    </a:p>
+                  </a:txBody>
+                  <a:tcPr>
+                    <a:solidFill>
+                      <a:srgbClr val="F5F5F5"/>
+                    </a:solidFill>
+                  </a:tcPr>
+                </a:tc>
+              </a:tr>
+              <a:tr h="457200">
+                <a:tc>
+                  <a:txBody>
+                    <a:bodyPr/>
+                    <a:lstStyle/>
+                    <a:p>
+                      <a:pPr algn="ctr">
+                        <a:defRPr sz="1300">
+                          <a:solidFill>
+                            <a:srgbClr val="333333"/>
+                          </a:solidFill>
+                        </a:defRPr>
+                      </a:pPr>
+                      <a:r>
+                        <a:t>Long-term systemic change</a:t>
+                      </a:r>
+                    </a:p>
+                  </a:txBody>
+                  <a:tcPr/>
+                </a:tc>
+                <a:tc>
+                  <a:txBody>
+                    <a:bodyPr/>
+                    <a:lstStyle/>
+                    <a:p>
+                      <a:pPr algn="ctr">
+                        <a:defRPr sz="1300">
+                          <a:solidFill>
+                            <a:srgbClr val="333333"/>
+                          </a:solidFill>
+                        </a:defRPr>
+                      </a:pPr>
+                      <a:r>
+                        <a:t>RTE</a:t>
+                      </a:r>
+                    </a:p>
+                  </a:txBody>
+                  <a:tcPr/>
+                </a:tc>
+                <a:tc>
+                  <a:txBody>
+                    <a:bodyPr/>
+                    <a:lstStyle/>
+                    <a:p>
+                      <a:pPr algn="ctr">
+                        <a:defRPr sz="1300">
+                          <a:solidFill>
+                            <a:srgbClr val="333333"/>
+                          </a:solidFill>
+                        </a:defRPr>
+                      </a:pPr>
+                      <a:r>
+                        <a:t>Generational education shift</a:t>
+                      </a:r>
+                    </a:p>
+                  </a:txBody>
+                  <a:tcPr/>
+                </a:tc>
+              </a:tr>
+              <a:tr h="457200">
+                <a:tc>
+                  <a:txBody>
+                    <a:bodyPr/>
+                    <a:lstStyle/>
+                    <a:p>
+                      <a:pPr algn="ctr">
+                        <a:defRPr sz="1300">
+                          <a:solidFill>
+                            <a:srgbClr val="333333"/>
+                          </a:solidFill>
+                        </a:defRPr>
+                      </a:pPr>
+                      <a:r>
+                        <a:t>Quick wins / demonstrable outcomes</a:t>
+                      </a:r>
+                    </a:p>
+                  </a:txBody>
+                  <a:tcPr>
+                    <a:solidFill>
+                      <a:srgbClr val="F5F5F5"/>
+                    </a:solidFill>
+                  </a:tcPr>
+                </a:tc>
+                <a:tc>
+                  <a:txBody>
+                    <a:bodyPr/>
+                    <a:lstStyle/>
+                    <a:p>
+                      <a:pPr algn="ctr">
+                        <a:defRPr sz="1300">
+                          <a:solidFill>
+                            <a:srgbClr val="333333"/>
+                          </a:solidFill>
+                        </a:defRPr>
+                      </a:pPr>
+                      <a:r>
+                        <a:t>Apprenticeship</a:t>
+                      </a:r>
+                    </a:p>
+                  </a:txBody>
+                  <a:tcPr>
+                    <a:solidFill>
+                      <a:srgbClr val="F5F5F5"/>
+                    </a:solidFill>
+                  </a:tcPr>
+                </a:tc>
+                <a:tc>
+                  <a:txBody>
+                    <a:bodyPr/>
+                    <a:lstStyle/>
+                    <a:p>
+                      <a:pPr algn="ctr">
+                        <a:defRPr sz="1300">
+                          <a:solidFill>
+                            <a:srgbClr val="333333"/>
+                          </a:solidFill>
+                        </a:defRPr>
+                      </a:pPr>
+                      <a:r>
+                        <a:t>Faster employment results</a:t>
+                      </a:r>
+                    </a:p>
+                  </a:txBody>
+                  <a:tcPr>
+                    <a:solidFill>
+                      <a:srgbClr val="F5F5F5"/>
+                    </a:solidFill>
+                  </a:tcPr>
+                </a:tc>
+              </a:tr>
+            </a:tbl>
+          </a:graphicData>
+        </a:graphic>
+      </p:graphicFrame>
+    </p:spTree>
+  </p:cSld>
+  <p:clrMapOvr>
+    <a:masterClrMapping/>
+  </p:clrMapOvr>
+</p:sld>
+</file>
+
+<file path=ppt/slides/slide23.xml><?xml version="1.0" encoding="utf-8"?>
+<p:sld xmlns:a="http://schemas.openxmlformats.org/drawingml/2006/main" xmlns:p="http://schemas.openxmlformats.org/presentationml/2006/main" xmlns:r="http://schemas.openxmlformats.org/officeDocument/2006/relationships">
+  <p:cSld>
+    <p:spTree>
+      <p:nvGrpSpPr>
+        <p:cNvPr id="1" name=""/>
+        <p:cNvGrpSpPr/>
+        <p:nvPr/>
+      </p:nvGrpSpPr>
+      <p:grpSpPr/>
+      <p:sp>
+        <p:nvSpPr>
+          <p:cNvPr id="2" name="Rectangle 1"/>
+          <p:cNvSpPr/>
+          <p:nvPr/>
+        </p:nvSpPr>
+        <p:spPr>
+          <a:xfrm>
+            <a:off x="0" y="1828800"/>
+            <a:ext cx="9144000" cy="1828800"/>
+          </a:xfrm>
+          <a:prstGeom prst="rect">
+            <a:avLst/>
+          </a:prstGeom>
+          <a:solidFill>
+            <a:srgbClr val="1A568C"/>
+          </a:solidFill>
+          <a:ln>
+            <a:noFill/>
+          </a:ln>
+        </p:spPr>
+        <p:style>
+          <a:lnRef idx="1">
+            <a:schemeClr val="accent1"/>
+          </a:lnRef>
+          <a:fillRef idx="3">
+            <a:schemeClr val="accent1"/>
+          </a:fillRef>
+          <a:effectRef idx="2">
+            <a:schemeClr val="accent1"/>
+          </a:effectRef>
+          <a:fontRef idx="minor">
+            <a:schemeClr val="lt1"/>
+          </a:fontRef>
+        </p:style>
+        <p:txBody>
+          <a:bodyPr rtlCol="0" anchor="ctr"/>
+          <a:lstStyle/>
+          <a:p>
+            <a:pPr algn="ctr"/>
+          </a:p>
+        </p:txBody>
+      </p:sp>
+      <p:sp>
+        <p:nvSpPr>
+          <p:cNvPr id="3" name="TextBox 2"/>
+          <p:cNvSpPr txBox="1"/>
+          <p:nvPr/>
+        </p:nvSpPr>
+        <p:spPr>
+          <a:xfrm>
+            <a:off x="457200" y="2103120"/>
+            <a:ext cx="8229600" cy="1371600"/>
+          </a:xfrm>
+          <a:prstGeom prst="rect">
+            <a:avLst/>
+          </a:prstGeom>
+          <a:noFill/>
+        </p:spPr>
+        <p:txBody>
+          <a:bodyPr wrap="none">
+            <a:spAutoFit/>
+          </a:bodyPr>
+          <a:lstStyle/>
+          <a:p>
+            <a:pPr algn="ctr">
+              <a:defRPr sz="3600" b="1">
+                <a:solidFill>
+                  <a:srgbClr val="FFFFFF"/>
+                </a:solidFill>
+              </a:defRPr>
+            </a:pPr>
+            <a:r>
+              <a:t>Appendix</a:t>
+            </a:r>
+          </a:p>
+        </p:txBody>
+      </p:sp>
+    </p:spTree>
+  </p:cSld>
+  <p:clrMapOvr>
+    <a:masterClrMapping/>
+  </p:clrMapOvr>
+</p:sld>
+</file>
+
+<file path=ppt/slides/slide24.xml><?xml version="1.0" encoding="utf-8"?>
+<p:sld xmlns:a="http://schemas.openxmlformats.org/drawingml/2006/main" xmlns:p="http://schemas.openxmlformats.org/presentationml/2006/main" xmlns:r="http://schemas.openxmlformats.org/officeDocument/2006/relationships">
+  <p:cSld>
+    <p:spTree>
+      <p:nvGrpSpPr>
+        <p:cNvPr id="1" name=""/>
+        <p:cNvGrpSpPr/>
+        <p:nvPr/>
+      </p:nvGrpSpPr>
+      <p:grpSpPr/>
+      <p:sp>
+        <p:nvSpPr>
+          <p:cNvPr id="2" name="TextBox 1"/>
+          <p:cNvSpPr txBox="1"/>
+          <p:nvPr/>
+        </p:nvSpPr>
+        <p:spPr>
+          <a:xfrm>
+            <a:off x="457200" y="274320"/>
+            <a:ext cx="8229600" cy="731520"/>
+          </a:xfrm>
+          <a:prstGeom prst="rect">
+            <a:avLst/>
+          </a:prstGeom>
+          <a:noFill/>
+        </p:spPr>
+        <p:txBody>
+          <a:bodyPr wrap="none">
+            <a:spAutoFit/>
+          </a:bodyPr>
+          <a:lstStyle/>
+          <a:p>
+            <a:pPr>
+              <a:defRPr sz="2800" b="1">
+                <a:solidFill>
+                  <a:srgbClr val="1A568C"/>
+                </a:solidFill>
+              </a:defRPr>
+            </a:pPr>
+            <a:r>
+              <a:t>Key Assumptions &amp; Confidence Levels</a:t>
+            </a:r>
+          </a:p>
+        </p:txBody>
+      </p:sp>
+      <p:graphicFrame>
+        <p:nvGraphicFramePr>
+          <p:cNvPr id="3" name="Table 2"/>
+          <p:cNvGraphicFramePr>
+            <a:graphicFrameLocks noGrp="1"/>
+          </p:cNvGraphicFramePr>
+          <p:nvPr/>
+        </p:nvGraphicFramePr>
+        <p:xfrm>
+          <a:off x="457200" y="1188720"/>
+          <a:ext cx="8229600" cy="4114800"/>
+        </p:xfrm>
+        <a:graphic>
+          <a:graphicData uri="http://schemas.openxmlformats.org/drawingml/2006/table">
+            <a:tbl>
+              <a:tblPr firstRow="1" bandRow="1">
+                <a:tableStyleId>{5C22544A-7EE6-4342-B048-85BDC9FD1C3A}</a:tableStyleId>
+              </a:tblPr>
+              <a:tblGrid>
+                <a:gridCol w="1645920"/>
+                <a:gridCol w="1645920"/>
+                <a:gridCol w="1645920"/>
+                <a:gridCol w="1645920"/>
+                <a:gridCol w="1645920"/>
+              </a:tblGrid>
+              <a:tr h="457200">
+                <a:tc>
+                  <a:txBody>
+                    <a:bodyPr/>
+                    <a:lstStyle/>
+                    <a:p>
+                      <a:pPr algn="ctr">
+                        <a:defRPr b="1" sz="1400">
+                          <a:solidFill>
+                            <a:srgbClr val="FFFFFF"/>
+                          </a:solidFill>
+                        </a:defRPr>
+                      </a:pPr>
+                      <a:r>
+                        <a:t>Parameter</a:t>
+                      </a:r>
+                    </a:p>
+                  </a:txBody>
+                  <a:tcPr>
+                    <a:solidFill>
+                      <a:srgbClr val="1A568C"/>
+                    </a:solidFill>
+                  </a:tcPr>
+                </a:tc>
+                <a:tc>
+                  <a:txBody>
+                    <a:bodyPr/>
+                    <a:lstStyle/>
+                    <a:p>
+                      <a:pPr algn="ctr">
+                        <a:defRPr b="1" sz="1400">
+                          <a:solidFill>
+                            <a:srgbClr val="FFFFFF"/>
+                          </a:solidFill>
+                        </a:defRPr>
+                      </a:pPr>
+                      <a:r>
+                        <a:t>Value</a:t>
+                      </a:r>
+                    </a:p>
+                  </a:txBody>
+                  <a:tcPr>
+                    <a:solidFill>
+                      <a:srgbClr val="1A568C"/>
+                    </a:solidFill>
+                  </a:tcPr>
+                </a:tc>
+                <a:tc>
+                  <a:txBody>
+                    <a:bodyPr/>
+                    <a:lstStyle/>
+                    <a:p>
+                      <a:pPr algn="ctr">
+                        <a:defRPr b="1" sz="1400">
+                          <a:solidFill>
+                            <a:srgbClr val="FFFFFF"/>
+                          </a:solidFill>
+                        </a:defRPr>
+                      </a:pPr>
+                      <a:r>
+                        <a:t>Range</a:t>
+                      </a:r>
+                    </a:p>
+                  </a:txBody>
+                  <a:tcPr>
+                    <a:solidFill>
+                      <a:srgbClr val="1A568C"/>
+                    </a:solidFill>
+                  </a:tcPr>
+                </a:tc>
+                <a:tc>
+                  <a:txBody>
+                    <a:bodyPr/>
+                    <a:lstStyle/>
+                    <a:p>
+                      <a:pPr algn="ctr">
+                        <a:defRPr b="1" sz="1400">
+                          <a:solidFill>
+                            <a:srgbClr val="FFFFFF"/>
+                          </a:solidFill>
+                        </a:defRPr>
+                      </a:pPr>
+                      <a:r>
+                        <a:t>Confidence</a:t>
+                      </a:r>
+                    </a:p>
+                  </a:txBody>
+                  <a:tcPr>
+                    <a:solidFill>
+                      <a:srgbClr val="1A568C"/>
+                    </a:solidFill>
+                  </a:tcPr>
+                </a:tc>
+                <a:tc>
+                  <a:txBody>
+                    <a:bodyPr/>
+                    <a:lstStyle/>
+                    <a:p>
+                      <a:pPr algn="ctr">
+                        <a:defRPr b="1" sz="1400">
+                          <a:solidFill>
+                            <a:srgbClr val="FFFFFF"/>
+                          </a:solidFill>
+                        </a:defRPr>
+                      </a:pPr>
+                      <a:r>
+                        <a:t>Tracer?</a:t>
+                      </a:r>
+                    </a:p>
+                  </a:txBody>
+                  <a:tcPr>
+                    <a:solidFill>
+                      <a:srgbClr val="1A568C"/>
+                    </a:solidFill>
+                  </a:tcPr>
+                </a:tc>
+              </a:tr>
+              <a:tr h="457200">
+                <a:tc>
+                  <a:txBody>
+                    <a:bodyPr/>
+                    <a:lstStyle/>
+                    <a:p>
+                      <a:pPr algn="ctr">
+                        <a:defRPr sz="1300">
+                          <a:solidFill>
+                            <a:srgbClr val="333333"/>
+                          </a:solidFill>
+                        </a:defRPr>
+                      </a:pPr>
+                      <a:r>
+                        <a:t>P(Formal|RTE)</a:t>
+                      </a:r>
+                    </a:p>
+                  </a:txBody>
+                  <a:tcPr>
+                    <a:solidFill>
+                      <a:srgbClr val="F5F5F5"/>
+                    </a:solidFill>
+                  </a:tcPr>
+                </a:tc>
+                <a:tc>
+                  <a:txBody>
+                    <a:bodyPr/>
+                    <a:lstStyle/>
+                    <a:p>
+                      <a:pPr algn="ctr">
+                        <a:defRPr sz="1300">
+                          <a:solidFill>
+                            <a:srgbClr val="333333"/>
+                          </a:solidFill>
+                        </a:defRPr>
+                      </a:pPr>
+                      <a:r>
+                        <a:t>30%</a:t>
+                      </a:r>
+                    </a:p>
+                  </a:txBody>
+                  <a:tcPr>
+                    <a:solidFill>
+                      <a:srgbClr val="F5F5F5"/>
+                    </a:solidFill>
+                  </a:tcPr>
+                </a:tc>
+                <a:tc>
+                  <a:txBody>
+                    <a:bodyPr/>
+                    <a:lstStyle/>
+                    <a:p>
+                      <a:pPr algn="ctr">
+                        <a:defRPr sz="1300">
+                          <a:solidFill>
+                            <a:srgbClr val="333333"/>
+                          </a:solidFill>
+                        </a:defRPr>
+                      </a:pPr>
+                      <a:r>
+                        <a:t>20-50%</a:t>
+                      </a:r>
+                    </a:p>
+                  </a:txBody>
+                  <a:tcPr>
+                    <a:solidFill>
+                      <a:srgbClr val="F5F5F5"/>
+                    </a:solidFill>
+                  </a:tcPr>
+                </a:tc>
+                <a:tc>
+                  <a:txBody>
+                    <a:bodyPr/>
+                    <a:lstStyle/>
+                    <a:p>
+                      <a:pPr algn="ctr">
+                        <a:defRPr sz="1300">
+                          <a:solidFill>
+                            <a:srgbClr val="333333"/>
+                          </a:solidFill>
+                        </a:defRPr>
+                      </a:pPr>
+                      <a:r>
+                        <a:t>LOW</a:t>
+                      </a:r>
+                    </a:p>
+                  </a:txBody>
+                  <a:tcPr>
+                    <a:solidFill>
+                      <a:srgbClr val="F5F5F5"/>
+                    </a:solidFill>
+                  </a:tcPr>
+                </a:tc>
+                <a:tc>
+                  <a:txBody>
+                    <a:bodyPr/>
+                    <a:lstStyle/>
+                    <a:p>
+                      <a:pPr algn="ctr">
+                        <a:defRPr sz="1300">
+                          <a:solidFill>
+                            <a:srgbClr val="333333"/>
+                          </a:solidFill>
+                        </a:defRPr>
+                      </a:pPr>
+                      <a:r>
+                        <a:t>Yes</a:t>
+                      </a:r>
+                    </a:p>
+                  </a:txBody>
+                  <a:tcPr>
+                    <a:solidFill>
+                      <a:srgbClr val="F5F5F5"/>
+                    </a:solidFill>
+                  </a:tcPr>
+                </a:tc>
+              </a:tr>
+              <a:tr h="457200">
+                <a:tc>
+                  <a:txBody>
+                    <a:bodyPr/>
+                    <a:lstStyle/>
+                    <a:p>
+                      <a:pPr algn="ctr">
+                        <a:defRPr sz="1300">
+                          <a:solidFill>
+                            <a:srgbClr val="333333"/>
+                          </a:solidFill>
+                        </a:defRPr>
+                      </a:pPr>
+                      <a:r>
+                        <a:t>P(Formal|Apprentice)</a:t>
+                      </a:r>
+                    </a:p>
+                  </a:txBody>
+                  <a:tcPr/>
+                </a:tc>
+                <a:tc>
+                  <a:txBody>
+                    <a:bodyPr/>
+                    <a:lstStyle/>
+                    <a:p>
+                      <a:pPr algn="ctr">
+                        <a:defRPr sz="1300">
+                          <a:solidFill>
+                            <a:srgbClr val="333333"/>
+                          </a:solidFill>
+                        </a:defRPr>
+                      </a:pPr>
+                      <a:r>
+                        <a:t>68%</a:t>
+                      </a:r>
+                    </a:p>
+                  </a:txBody>
+                  <a:tcPr/>
+                </a:tc>
+                <a:tc>
+                  <a:txBody>
+                    <a:bodyPr/>
+                    <a:lstStyle/>
+                    <a:p>
+                      <a:pPr algn="ctr">
+                        <a:defRPr sz="1300">
+                          <a:solidFill>
+                            <a:srgbClr val="333333"/>
+                          </a:solidFill>
+                        </a:defRPr>
+                      </a:pPr>
+                      <a:r>
+                        <a:t>50-90%</a:t>
+                      </a:r>
+                    </a:p>
+                  </a:txBody>
+                  <a:tcPr/>
+                </a:tc>
+                <a:tc>
+                  <a:txBody>
+                    <a:bodyPr/>
+                    <a:lstStyle/>
+                    <a:p>
+                      <a:pPr algn="ctr">
+                        <a:defRPr sz="1300">
+                          <a:solidFill>
+                            <a:srgbClr val="333333"/>
+                          </a:solidFill>
+                        </a:defRPr>
+                      </a:pPr>
+                      <a:r>
+                        <a:t>HIGH</a:t>
+                      </a:r>
+                    </a:p>
+                  </a:txBody>
+                  <a:tcPr/>
+                </a:tc>
+                <a:tc>
+                  <a:txBody>
+                    <a:bodyPr/>
+                    <a:lstStyle/>
+                    <a:p>
+                      <a:pPr algn="ctr">
+                        <a:defRPr sz="1300">
+                          <a:solidFill>
+                            <a:srgbClr val="333333"/>
+                          </a:solidFill>
+                        </a:defRPr>
+                      </a:pPr>
+                      <a:r>
+                        <a:t>Yes</a:t>
+                      </a:r>
+                    </a:p>
+                  </a:txBody>
+                  <a:tcPr/>
+                </a:tc>
+              </a:tr>
+              <a:tr h="457200">
+                <a:tc>
+                  <a:txBody>
+                    <a:bodyPr/>
+                    <a:lstStyle/>
+                    <a:p>
+                      <a:pPr algn="ctr">
+                        <a:defRPr sz="1300">
+                          <a:solidFill>
+                            <a:srgbClr val="333333"/>
+                          </a:solidFill>
+                        </a:defRPr>
+                      </a:pPr>
+                      <a:r>
+                        <a:t>Decay Half-Life</a:t>
+                      </a:r>
+                    </a:p>
+                  </a:txBody>
+                  <a:tcPr>
+                    <a:solidFill>
+                      <a:srgbClr val="F5F5F5"/>
+                    </a:solidFill>
+                  </a:tcPr>
+                </a:tc>
+                <a:tc>
+                  <a:txBody>
+                    <a:bodyPr/>
+                    <a:lstStyle/>
+                    <a:p>
+                      <a:pPr algn="ctr">
+                        <a:defRPr sz="1300">
+                          <a:solidFill>
+                            <a:srgbClr val="333333"/>
+                          </a:solidFill>
+                        </a:defRPr>
+                      </a:pPr>
+                      <a:r>
+                        <a:t>10 yrs</a:t>
+                      </a:r>
+                    </a:p>
+                  </a:txBody>
+                  <a:tcPr>
+                    <a:solidFill>
+                      <a:srgbClr val="F5F5F5"/>
+                    </a:solidFill>
+                  </a:tcPr>
+                </a:tc>
+                <a:tc>
+                  <a:txBody>
+                    <a:bodyPr/>
+                    <a:lstStyle/>
+                    <a:p>
+                      <a:pPr algn="ctr">
+                        <a:defRPr sz="1300">
+                          <a:solidFill>
+                            <a:srgbClr val="333333"/>
+                          </a:solidFill>
+                        </a:defRPr>
+                      </a:pPr>
+                      <a:r>
+                        <a:t>5-50 yrs</a:t>
+                      </a:r>
+                    </a:p>
+                  </a:txBody>
+                  <a:tcPr>
+                    <a:solidFill>
+                      <a:srgbClr val="F5F5F5"/>
+                    </a:solidFill>
+                  </a:tcPr>
+                </a:tc>
+                <a:tc>
+                  <a:txBody>
+                    <a:bodyPr/>
+                    <a:lstStyle/>
+                    <a:p>
+                      <a:pPr algn="ctr">
+                        <a:defRPr sz="1300">
+                          <a:solidFill>
+                            <a:srgbClr val="333333"/>
+                          </a:solidFill>
+                        </a:defRPr>
+                      </a:pPr>
+                      <a:r>
+                        <a:t>LOW</a:t>
+                      </a:r>
+                    </a:p>
+                  </a:txBody>
+                  <a:tcPr>
+                    <a:solidFill>
+                      <a:srgbClr val="F5F5F5"/>
+                    </a:solidFill>
+                  </a:tcPr>
+                </a:tc>
+                <a:tc>
+                  <a:txBody>
+                    <a:bodyPr/>
+                    <a:lstStyle/>
+                    <a:p>
+                      <a:pPr algn="ctr">
+                        <a:defRPr sz="1300">
+                          <a:solidFill>
+                            <a:srgbClr val="333333"/>
+                          </a:solidFill>
+                        </a:defRPr>
+                      </a:pPr>
+                      <a:r>
+                        <a:t>Partial</a:t>
+                      </a:r>
+                    </a:p>
+                  </a:txBody>
+                  <a:tcPr>
+                    <a:solidFill>
+                      <a:srgbClr val="F5F5F5"/>
+                    </a:solidFill>
+                  </a:tcPr>
+                </a:tc>
+              </a:tr>
+              <a:tr h="457200">
+                <a:tc>
+                  <a:txBody>
+                    <a:bodyPr/>
+                    <a:lstStyle/>
+                    <a:p>
+                      <a:pPr algn="ctr">
+                        <a:defRPr sz="1300">
+                          <a:solidFill>
+                            <a:srgbClr val="333333"/>
+                          </a:solidFill>
+                        </a:defRPr>
+                      </a:pPr>
+                      <a:r>
+                        <a:t>RTE Retention</a:t>
+                      </a:r>
+                    </a:p>
+                  </a:txBody>
+                  <a:tcPr/>
+                </a:tc>
+                <a:tc>
+                  <a:txBody>
+                    <a:bodyPr/>
+                    <a:lstStyle/>
+                    <a:p>
+                      <a:pPr algn="ctr">
+                        <a:defRPr sz="1300">
+                          <a:solidFill>
+                            <a:srgbClr val="333333"/>
+                          </a:solidFill>
+                        </a:defRPr>
+                      </a:pPr>
+                      <a:r>
+                        <a:t>60%</a:t>
+                      </a:r>
+                    </a:p>
+                  </a:txBody>
+                  <a:tcPr/>
+                </a:tc>
+                <a:tc>
+                  <a:txBody>
+                    <a:bodyPr/>
+                    <a:lstStyle/>
+                    <a:p>
+                      <a:pPr algn="ctr">
+                        <a:defRPr sz="1300">
+                          <a:solidFill>
+                            <a:srgbClr val="333333"/>
+                          </a:solidFill>
+                        </a:defRPr>
+                      </a:pPr>
+                      <a:r>
+                        <a:t>50-75%</a:t>
+                      </a:r>
+                    </a:p>
+                  </a:txBody>
+                  <a:tcPr/>
+                </a:tc>
+                <a:tc>
+                  <a:txBody>
+                    <a:bodyPr/>
+                    <a:lstStyle/>
+                    <a:p>
+                      <a:pPr algn="ctr">
+                        <a:defRPr sz="1300">
+                          <a:solidFill>
+                            <a:srgbClr val="333333"/>
+                          </a:solidFill>
+                        </a:defRPr>
+                      </a:pPr>
+                      <a:r>
+                        <a:t>LOW</a:t>
+                      </a:r>
+                    </a:p>
+                  </a:txBody>
+                  <a:tcPr/>
+                </a:tc>
+                <a:tc>
+                  <a:txBody>
+                    <a:bodyPr/>
+                    <a:lstStyle/>
+                    <a:p>
+                      <a:pPr algn="ctr">
+                        <a:defRPr sz="1300">
+                          <a:solidFill>
+                            <a:srgbClr val="333333"/>
+                          </a:solidFill>
+                        </a:defRPr>
+                      </a:pPr>
+                      <a:r>
+                        <a:t>Yes</a:t>
+                      </a:r>
+                    </a:p>
+                  </a:txBody>
+                  <a:tcPr/>
+                </a:tc>
+              </a:tr>
+              <a:tr h="457200">
+                <a:tc>
+                  <a:txBody>
+                    <a:bodyPr/>
+                    <a:lstStyle/>
+                    <a:p>
+                      <a:pPr algn="ctr">
+                        <a:defRPr sz="1300">
+                          <a:solidFill>
+                            <a:srgbClr val="333333"/>
+                          </a:solidFill>
+                        </a:defRPr>
+                      </a:pPr>
+                      <a:r>
+                        <a:t>Completion Rate</a:t>
+                      </a:r>
+                    </a:p>
+                  </a:txBody>
+                  <a:tcPr>
+                    <a:solidFill>
+                      <a:srgbClr val="F5F5F5"/>
+                    </a:solidFill>
+                  </a:tcPr>
+                </a:tc>
+                <a:tc>
+                  <a:txBody>
+                    <a:bodyPr/>
+                    <a:lstStyle/>
+                    <a:p>
+                      <a:pPr algn="ctr">
+                        <a:defRPr sz="1300">
+                          <a:solidFill>
+                            <a:srgbClr val="333333"/>
+                          </a:solidFill>
+                        </a:defRPr>
+                      </a:pPr>
+                      <a:r>
+                        <a:t>85%</a:t>
+                      </a:r>
+                    </a:p>
+                  </a:txBody>
+                  <a:tcPr>
+                    <a:solidFill>
+                      <a:srgbClr val="F5F5F5"/>
+                    </a:solidFill>
+                  </a:tcPr>
+                </a:tc>
+                <a:tc>
+                  <a:txBody>
+                    <a:bodyPr/>
+                    <a:lstStyle/>
+                    <a:p>
+                      <a:pPr algn="ctr">
+                        <a:defRPr sz="1300">
+                          <a:solidFill>
+                            <a:srgbClr val="333333"/>
+                          </a:solidFill>
+                        </a:defRPr>
+                      </a:pPr>
+                      <a:r>
+                        <a:t>75-95%</a:t>
+                      </a:r>
+                    </a:p>
+                  </a:txBody>
+                  <a:tcPr>
+                    <a:solidFill>
+                      <a:srgbClr val="F5F5F5"/>
+                    </a:solidFill>
+                  </a:tcPr>
+                </a:tc>
+                <a:tc>
+                  <a:txBody>
+                    <a:bodyPr/>
+                    <a:lstStyle/>
+                    <a:p>
+                      <a:pPr algn="ctr">
+                        <a:defRPr sz="1300">
+                          <a:solidFill>
+                            <a:srgbClr val="333333"/>
+                          </a:solidFill>
+                        </a:defRPr>
+                      </a:pPr>
+                      <a:r>
+                        <a:t>LOW</a:t>
+                      </a:r>
+                    </a:p>
+                  </a:txBody>
+                  <a:tcPr>
+                    <a:solidFill>
+                      <a:srgbClr val="F5F5F5"/>
+                    </a:solidFill>
+                  </a:tcPr>
+                </a:tc>
+                <a:tc>
+                  <a:txBody>
+                    <a:bodyPr/>
+                    <a:lstStyle/>
+                    <a:p>
+                      <a:pPr algn="ctr">
+                        <a:defRPr sz="1300">
+                          <a:solidFill>
+                            <a:srgbClr val="333333"/>
+                          </a:solidFill>
+                        </a:defRPr>
+                      </a:pPr>
+                      <a:r>
+                        <a:t>Yes</a:t>
+                      </a:r>
+                    </a:p>
+                  </a:txBody>
+                  <a:tcPr>
+                    <a:solidFill>
+                      <a:srgbClr val="F5F5F5"/>
+                    </a:solidFill>
+                  </a:tcPr>
+                </a:tc>
+              </a:tr>
+              <a:tr h="457200">
+                <a:tc>
+                  <a:txBody>
+                    <a:bodyPr/>
+                    <a:lstStyle/>
+                    <a:p>
+                      <a:pPr algn="ctr">
+                        <a:defRPr sz="1300">
+                          <a:solidFill>
+                            <a:srgbClr val="333333"/>
+                          </a:solidFill>
+                        </a:defRPr>
+                      </a:pPr>
+                      <a:r>
+                        <a:t>Mincer Return</a:t>
+                      </a:r>
+                    </a:p>
+                  </a:txBody>
+                  <a:tcPr/>
+                </a:tc>
+                <a:tc>
+                  <a:txBody>
+                    <a:bodyPr/>
+                    <a:lstStyle/>
+                    <a:p>
+                      <a:pPr algn="ctr">
+                        <a:defRPr sz="1300">
+                          <a:solidFill>
+                            <a:srgbClr val="333333"/>
+                          </a:solidFill>
+                        </a:defRPr>
+                      </a:pPr>
+                      <a:r>
+                        <a:t>5.8%/yr</a:t>
+                      </a:r>
+                    </a:p>
+                  </a:txBody>
+                  <a:tcPr/>
+                </a:tc>
+                <a:tc>
+                  <a:txBody>
+                    <a:bodyPr/>
+                    <a:lstStyle/>
+                    <a:p>
+                      <a:pPr algn="ctr">
+                        <a:defRPr sz="1300">
+                          <a:solidFill>
+                            <a:srgbClr val="333333"/>
+                          </a:solidFill>
+                        </a:defRPr>
+                      </a:pPr>
+                      <a:r>
+                        <a:t>5-8%</a:t>
+                      </a:r>
+                    </a:p>
+                  </a:txBody>
+                  <a:tcPr/>
+                </a:tc>
+                <a:tc>
+                  <a:txBody>
+                    <a:bodyPr/>
+                    <a:lstStyle/>
+                    <a:p>
+                      <a:pPr algn="ctr">
+                        <a:defRPr sz="1300">
+                          <a:solidFill>
+                            <a:srgbClr val="333333"/>
+                          </a:solidFill>
+                        </a:defRPr>
+                      </a:pPr>
+                      <a:r>
+                        <a:t>MODERATE</a:t>
+                      </a:r>
+                    </a:p>
+                  </a:txBody>
+                  <a:tcPr/>
+                </a:tc>
+                <a:tc>
+                  <a:txBody>
+                    <a:bodyPr/>
+                    <a:lstStyle/>
+                    <a:p>
+                      <a:pPr algn="ctr">
+                        <a:defRPr sz="1300">
+                          <a:solidFill>
+                            <a:srgbClr val="333333"/>
+                          </a:solidFill>
+                        </a:defRPr>
+                      </a:pPr>
+                      <a:r>
+                        <a:t>No</a:t>
+                      </a:r>
+                    </a:p>
+                  </a:txBody>
+                  <a:tcPr/>
+                </a:tc>
+              </a:tr>
+              <a:tr h="457200">
+                <a:tc>
+                  <a:txBody>
+                    <a:bodyPr/>
+                    <a:lstStyle/>
+                    <a:p>
+                      <a:pPr algn="ctr">
+                        <a:defRPr sz="1300">
+                          <a:solidFill>
+                            <a:srgbClr val="333333"/>
+                          </a:solidFill>
+                        </a:defRPr>
+                      </a:pPr>
+                      <a:r>
+                        <a:t>Discount Rate</a:t>
+                      </a:r>
+                    </a:p>
+                  </a:txBody>
+                  <a:tcPr>
+                    <a:solidFill>
+                      <a:srgbClr val="F5F5F5"/>
+                    </a:solidFill>
+                  </a:tcPr>
+                </a:tc>
+                <a:tc>
+                  <a:txBody>
+                    <a:bodyPr/>
+                    <a:lstStyle/>
+                    <a:p>
+                      <a:pPr algn="ctr">
+                        <a:defRPr sz="1300">
+                          <a:solidFill>
+                            <a:srgbClr val="333333"/>
+                          </a:solidFill>
+                        </a:defRPr>
+                      </a:pPr>
+                      <a:r>
+                        <a:t>5%</a:t>
+                      </a:r>
+                    </a:p>
+                  </a:txBody>
+                  <a:tcPr>
+                    <a:solidFill>
+                      <a:srgbClr val="F5F5F5"/>
+                    </a:solidFill>
+                  </a:tcPr>
+                </a:tc>
+                <a:tc>
+                  <a:txBody>
+                    <a:bodyPr/>
+                    <a:lstStyle/>
+                    <a:p>
+                      <a:pPr algn="ctr">
+                        <a:defRPr sz="1300">
+                          <a:solidFill>
+                            <a:srgbClr val="333333"/>
+                          </a:solidFill>
+                        </a:defRPr>
+                      </a:pPr>
+                      <a:r>
+                        <a:t>3-8%</a:t>
+                      </a:r>
+                    </a:p>
+                  </a:txBody>
+                  <a:tcPr>
+                    <a:solidFill>
+                      <a:srgbClr val="F5F5F5"/>
+                    </a:solidFill>
+                  </a:tcPr>
+                </a:tc>
+                <a:tc>
+                  <a:txBody>
+                    <a:bodyPr/>
+                    <a:lstStyle/>
+                    <a:p>
+                      <a:pPr algn="ctr">
+                        <a:defRPr sz="1300">
+                          <a:solidFill>
+                            <a:srgbClr val="333333"/>
+                          </a:solidFill>
+                        </a:defRPr>
+                      </a:pPr>
+                      <a:r>
+                        <a:t>MODERATE</a:t>
+                      </a:r>
+                    </a:p>
+                  </a:txBody>
+                  <a:tcPr>
+                    <a:solidFill>
+                      <a:srgbClr val="F5F5F5"/>
+                    </a:solidFill>
+                  </a:tcPr>
+                </a:tc>
+                <a:tc>
+                  <a:txBody>
+                    <a:bodyPr/>
+                    <a:lstStyle/>
+                    <a:p>
+                      <a:pPr algn="ctr">
+                        <a:defRPr sz="1300">
+                          <a:solidFill>
+                            <a:srgbClr val="333333"/>
+                          </a:solidFill>
+                        </a:defRPr>
+                      </a:pPr>
+                      <a:r>
+                        <a:t>No</a:t>
+                      </a:r>
+                    </a:p>
+                  </a:txBody>
+                  <a:tcPr>
+                    <a:solidFill>
+                      <a:srgbClr val="F5F5F5"/>
+                    </a:solidFill>
+                  </a:tcPr>
+                </a:tc>
+              </a:tr>
+              <a:tr h="457200">
+                <a:tc>
+                  <a:txBody>
+                    <a:bodyPr/>
+                    <a:lstStyle/>
+                    <a:p>
+                      <a:pPr algn="ctr">
+                        <a:defRPr sz="1300">
+                          <a:solidFill>
+                            <a:srgbClr val="333333"/>
+                          </a:solidFill>
+                        </a:defRPr>
+                      </a:pPr>
+                      <a:r>
+                        <a:t>Wage Growth (Formal)</a:t>
+                      </a:r>
+                    </a:p>
+                  </a:txBody>
+                  <a:tcPr/>
+                </a:tc>
+                <a:tc>
+                  <a:txBody>
+                    <a:bodyPr/>
+                    <a:lstStyle/>
+                    <a:p>
+                      <a:pPr algn="ctr">
+                        <a:defRPr sz="1300">
+                          <a:solidFill>
+                            <a:srgbClr val="333333"/>
+                          </a:solidFill>
+                        </a:defRPr>
+                      </a:pPr>
+                      <a:r>
+                        <a:t>1.5%/yr</a:t>
+                      </a:r>
+                    </a:p>
+                  </a:txBody>
+                  <a:tcPr/>
+                </a:tc>
+                <a:tc>
+                  <a:txBody>
+                    <a:bodyPr/>
+                    <a:lstStyle/>
+                    <a:p>
+                      <a:pPr algn="ctr">
+                        <a:defRPr sz="1300">
+                          <a:solidFill>
+                            <a:srgbClr val="333333"/>
+                          </a:solidFill>
+                        </a:defRPr>
+                      </a:pPr>
+                      <a:r>
+                        <a:t>0.5-2.5%</a:t>
+                      </a:r>
+                    </a:p>
+                  </a:txBody>
+                  <a:tcPr/>
+                </a:tc>
+                <a:tc>
+                  <a:txBody>
+                    <a:bodyPr/>
+                    <a:lstStyle/>
+                    <a:p>
+                      <a:pPr algn="ctr">
+                        <a:defRPr sz="1300">
+                          <a:solidFill>
+                            <a:srgbClr val="333333"/>
+                          </a:solidFill>
+                        </a:defRPr>
+                      </a:pPr>
+                      <a:r>
+                        <a:t>MODERATE</a:t>
+                      </a:r>
+                    </a:p>
+                  </a:txBody>
+                  <a:tcPr/>
+                </a:tc>
+                <a:tc>
+                  <a:txBody>
+                    <a:bodyPr/>
+                    <a:lstStyle/>
+                    <a:p>
+                      <a:pPr algn="ctr">
+                        <a:defRPr sz="1300">
+                          <a:solidFill>
+                            <a:srgbClr val="333333"/>
+                          </a:solidFill>
+                        </a:defRPr>
+                      </a:pPr>
+                      <a:r>
+                        <a:t>No</a:t>
+                      </a:r>
+                    </a:p>
+                  </a:txBody>
+                  <a:tcPr/>
+                </a:tc>
+              </a:tr>
+            </a:tbl>
+          </a:graphicData>
+        </a:graphic>
+      </p:graphicFrame>
+      <p:sp>
+        <p:nvSpPr>
+          <p:cNvPr id="4" name="TextBox 3"/>
+          <p:cNvSpPr txBox="1"/>
+          <p:nvPr/>
+        </p:nvSpPr>
+        <p:spPr>
+          <a:xfrm>
+            <a:off x="457200" y="4572000"/>
+            <a:ext cx="8229600" cy="548640"/>
+          </a:xfrm>
+          <a:prstGeom prst="rect">
+            <a:avLst/>
+          </a:prstGeom>
+          <a:noFill/>
+        </p:spPr>
+        <p:txBody>
+          <a:bodyPr wrap="square">
+            <a:spAutoFit/>
+          </a:bodyPr>
+          <a:lstStyle/>
+          <a:p>
+            <a:pPr>
+              <a:defRPr sz="1400" i="1">
+                <a:solidFill>
+                  <a:srgbClr val="4A90D9"/>
+                </a:solidFill>
+              </a:defRPr>
+            </a:pPr>
+            <a:r>
+              <a:t>💡 Of 12 high-impact parameters, only 1 has HIGH confidence. The tracer study (Rs 45-55L) would validate the 4 most uncertain parameters.</a:t>
+            </a:r>
+          </a:p>
+        </p:txBody>
+      </p:sp>
+    </p:spTree>
+  </p:cSld>
+  <p:clrMapOvr>
+    <a:masterClrMapping/>
+  </p:clrMapOvr>
+</p:sld>
+</file>
+
+<file path=ppt/slides/slide25.xml><?xml version="1.0" encoding="utf-8"?>
+<p:sld xmlns:a="http://schemas.openxmlformats.org/drawingml/2006/main" xmlns:p="http://schemas.openxmlformats.org/presentationml/2006/main" xmlns:r="http://schemas.openxmlformats.org/officeDocument/2006/relationships">
+  <p:cSld>
+    <p:spTree>
+      <p:nvGrpSpPr>
+        <p:cNvPr id="1" name=""/>
+        <p:cNvGrpSpPr/>
+        <p:nvPr/>
+      </p:nvGrpSpPr>
+      <p:grpSpPr/>
+      <p:sp>
+        <p:nvSpPr>
+          <p:cNvPr id="2" name="TextBox 1"/>
+          <p:cNvSpPr txBox="1"/>
+          <p:nvPr/>
+        </p:nvSpPr>
+        <p:spPr>
+          <a:xfrm>
+            <a:off x="457200" y="2286000"/>
+            <a:ext cx="8229600" cy="1371600"/>
+          </a:xfrm>
+          <a:prstGeom prst="rect">
+            <a:avLst/>
+          </a:prstGeom>
+          <a:noFill/>
+        </p:spPr>
+        <p:txBody>
+          <a:bodyPr wrap="none">
+            <a:spAutoFit/>
+          </a:bodyPr>
+          <a:lstStyle/>
+          <a:p>
+            <a:pPr algn="ctr">
+              <a:defRPr sz="4000" b="1">
+                <a:solidFill>
+                  <a:srgbClr val="1A568C"/>
+                </a:solidFill>
+              </a:defRPr>
+            </a:pPr>
+            <a:r>
+              <a:t>Thank You</a:t>
+            </a:r>
+          </a:p>
+        </p:txBody>
+      </p:sp>
+      <p:sp>
+        <p:nvSpPr>
+          <p:cNvPr id="3" name="TextBox 2"/>
+          <p:cNvSpPr txBox="1"/>
+          <p:nvPr/>
+        </p:nvSpPr>
+        <p:spPr>
+          <a:xfrm>
+            <a:off x="457200" y="3657600"/>
+            <a:ext cx="8229600" cy="914400"/>
+          </a:xfrm>
+          <a:prstGeom prst="rect">
+            <a:avLst/>
+          </a:prstGeom>
+          <a:noFill/>
+        </p:spPr>
+        <p:txBody>
+          <a:bodyPr wrap="none">
+            <a:spAutoFit/>
+          </a:bodyPr>
+          <a:lstStyle/>
+          <a:p>
+            <a:pPr algn="ctr">
+              <a:defRPr sz="2400">
+                <a:solidFill>
+                  <a:srgbClr val="959595"/>
+                </a:solidFill>
+              </a:defRPr>
+            </a:pPr>
+            <a:r>
+              <a:t>Both interventions generate positive returns in ALL 32 scenarios tested.</a:t>
+            </a:r>
+            <a:br/>
+            <a:r>
+              <a:t>The key question is how to optimize delivery for maximum impact.</a:t>
+            </a:r>
+            <a:br/>
+            <a:br/>
+            <a:r>
+              <a:t>RWF Economic Impact Model  •  February 2026</a:t>
             </a:r>
           </a:p>
         </p:txBody>
